--- a/data/deep_dives/carteira_credilog_fidc_axon_transportes_23d0cc90/exports/documentary_comparison.pptx
+++ b/data/deep_dives/carteira_credilog_fidc_axon_transportes_23d0cc90/exports/documentary_comparison.pptx
@@ -4437,7 +4437,7 @@
         </p:nvGraphicFramePr>
         <p:xfrm>
           <a:off x="438912" y="932688"/>
-          <a:ext cx="11313870" cy="3218688"/>
+          <a:ext cx="11313870" cy="2656332"/>
         </p:xfrm>
         <a:graphic>
           <a:graphicData uri="http://schemas.openxmlformats.org/drawingml/2006/table">
@@ -4472,7 +4472,7 @@
                       <a:r>
                         <a:rPr sz="1300" b="1">
                           <a:solidFill>
-                            <a:srgbClr val="1F1F1F"/>
+                            <a:srgbClr val="FFFFFF"/>
                           </a:solidFill>
                           <a:latin typeface="Calibri"/>
                         </a:rPr>
@@ -4482,7 +4482,7 @@
                   </a:txBody>
                   <a:tcPr marL="91440" marR="91440" marT="41148" marB="41148" anchor="ctr">
                     <a:solidFill>
-                      <a:srgbClr val="EC7000"/>
+                      <a:srgbClr val="FF6200"/>
                     </a:solidFill>
                     <a:lnL>
                       <a:noFill/>
@@ -4521,7 +4521,7 @@
                       <a:r>
                         <a:rPr sz="1300" b="1">
                           <a:solidFill>
-                            <a:srgbClr val="1F1F1F"/>
+                            <a:srgbClr val="FFFFFF"/>
                           </a:solidFill>
                           <a:latin typeface="Calibri"/>
                         </a:rPr>
@@ -4531,7 +4531,7 @@
                   </a:txBody>
                   <a:tcPr marL="91440" marR="91440" marT="41148" marB="41148" anchor="ctr">
                     <a:solidFill>
-                      <a:srgbClr val="EC7000"/>
+                      <a:srgbClr val="FF6200"/>
                     </a:solidFill>
                     <a:lnL>
                       <a:noFill/>
@@ -4570,7 +4570,7 @@
                       <a:r>
                         <a:rPr sz="1300" b="1">
                           <a:solidFill>
-                            <a:srgbClr val="1F1F1F"/>
+                            <a:srgbClr val="FFFFFF"/>
                           </a:solidFill>
                           <a:latin typeface="Calibri"/>
                         </a:rPr>
@@ -4580,7 +4580,7 @@
                   </a:txBody>
                   <a:tcPr marL="91440" marR="91440" marT="41148" marB="41148" anchor="ctr">
                     <a:solidFill>
-                      <a:srgbClr val="EC7000"/>
+                      <a:srgbClr val="FF6200"/>
                     </a:solidFill>
                     <a:lnL>
                       <a:noFill/>
@@ -4786,7 +4786,7 @@
                   </a:tcPr>
                 </a:tc>
               </a:tr>
-              <a:tr h="470916">
+              <a:tr h="283464">
                 <a:tc>
                   <a:txBody>
                     <a:bodyPr wrap="square">
@@ -4859,29 +4859,7 @@
                           </a:solidFill>
                           <a:latin typeface="Calibri"/>
                         </a:rPr>
-                        <a:t>Não localizado nas fontes acessíveis desta</a:t>
-                      </a:r>
-                    </a:p>
-                    <a:p>
-                      <a:pPr algn="ctr">
-                        <a:lnSpc>
-                          <a:spcPct val="100000"/>
-                        </a:lnSpc>
-                        <a:spcBef>
-                          <a:spcPts val="0"/>
-                        </a:spcBef>
-                        <a:spcAft>
-                          <a:spcPts val="0"/>
-                        </a:spcAft>
-                      </a:pPr>
-                      <a:r>
-                        <a:rPr sz="1300" b="0">
-                          <a:solidFill>
-                            <a:srgbClr val="1F1F1F"/>
-                          </a:solidFill>
-                          <a:latin typeface="Calibri"/>
-                        </a:rPr>
-                        <a:t>leitura</a:t>
+                        <a:t>-</a:t>
                       </a:r>
                     </a:p>
                   </a:txBody>
@@ -4928,9 +4906,83 @@
                           </a:solidFill>
                           <a:latin typeface="Calibri"/>
                         </a:rPr>
-                        <a:t>Não localizado nas cláusulas revisadas; requer</a:t>
-                      </a:r>
-                    </a:p>
+                        <a:t>-</a:t>
+                      </a:r>
+                    </a:p>
+                  </a:txBody>
+                  <a:tcPr marL="91440" marR="91440" marT="41148" marB="41148" anchor="ctr">
+                    <a:solidFill>
+                      <a:srgbClr val="FFFFFF"/>
+                    </a:solidFill>
+                    <a:lnL>
+                      <a:noFill/>
+                    </a:lnL>
+                    <a:lnR>
+                      <a:noFill/>
+                    </a:lnR>
+                    <a:lnT>
+                      <a:noFill/>
+                    </a:lnT>
+                    <a:lnB>
+                      <a:noFill/>
+                    </a:lnB>
+                  </a:tcPr>
+                </a:tc>
+              </a:tr>
+              <a:tr h="283464">
+                <a:tc>
+                  <a:txBody>
+                    <a:bodyPr wrap="square">
+                      <a:noAutofit/>
+                    </a:bodyPr>
+                    <a:lstStyle/>
+                    <a:p>
+                      <a:pPr algn="l">
+                        <a:lnSpc>
+                          <a:spcPct val="100000"/>
+                        </a:lnSpc>
+                        <a:spcBef>
+                          <a:spcPts val="0"/>
+                        </a:spcBef>
+                        <a:spcAft>
+                          <a:spcPts val="0"/>
+                        </a:spcAft>
+                      </a:pPr>
+                      <a:r>
+                        <a:rPr sz="1300" b="1">
+                          <a:solidFill>
+                            <a:srgbClr val="1F1F1F"/>
+                          </a:solidFill>
+                          <a:latin typeface="Calibri"/>
+                        </a:rPr>
+                        <a:t>Devedor</a:t>
+                      </a:r>
+                    </a:p>
+                  </a:txBody>
+                  <a:tcPr marL="91440" marR="91440" marT="41148" marB="41148" anchor="ctr">
+                    <a:solidFill>
+                      <a:srgbClr val="FFFFFF"/>
+                    </a:solidFill>
+                    <a:lnL>
+                      <a:noFill/>
+                    </a:lnL>
+                    <a:lnR>
+                      <a:noFill/>
+                    </a:lnR>
+                    <a:lnT>
+                      <a:noFill/>
+                    </a:lnT>
+                    <a:lnB>
+                      <a:noFill/>
+                    </a:lnB>
+                  </a:tcPr>
+                </a:tc>
+                <a:tc>
+                  <a:txBody>
+                    <a:bodyPr wrap="square">
+                      <a:noAutofit/>
+                    </a:bodyPr>
+                    <a:lstStyle/>
                     <a:p>
                       <a:pPr algn="ctr">
                         <a:lnSpc>
@@ -4950,7 +5002,54 @@
                           </a:solidFill>
                           <a:latin typeface="Calibri"/>
                         </a:rPr>
-                        <a:t>documento aplicável</a:t>
+                        <a:t>-</a:t>
+                      </a:r>
+                    </a:p>
+                  </a:txBody>
+                  <a:tcPr marL="91440" marR="91440" marT="41148" marB="41148" anchor="ctr">
+                    <a:solidFill>
+                      <a:srgbClr val="FFFFFF"/>
+                    </a:solidFill>
+                    <a:lnL>
+                      <a:noFill/>
+                    </a:lnL>
+                    <a:lnR>
+                      <a:noFill/>
+                    </a:lnR>
+                    <a:lnT>
+                      <a:noFill/>
+                    </a:lnT>
+                    <a:lnB>
+                      <a:noFill/>
+                    </a:lnB>
+                  </a:tcPr>
+                </a:tc>
+                <a:tc>
+                  <a:txBody>
+                    <a:bodyPr wrap="square">
+                      <a:noAutofit/>
+                    </a:bodyPr>
+                    <a:lstStyle/>
+                    <a:p>
+                      <a:pPr algn="ctr">
+                        <a:lnSpc>
+                          <a:spcPct val="100000"/>
+                        </a:lnSpc>
+                        <a:spcBef>
+                          <a:spcPts val="0"/>
+                        </a:spcBef>
+                        <a:spcAft>
+                          <a:spcPts val="0"/>
+                        </a:spcAft>
+                      </a:pPr>
+                      <a:r>
+                        <a:rPr sz="1300" b="0">
+                          <a:solidFill>
+                            <a:srgbClr val="1F1F1F"/>
+                          </a:solidFill>
+                          <a:latin typeface="Calibri"/>
+                        </a:rPr>
+                        <a:t>-</a:t>
                       </a:r>
                     </a:p>
                   </a:txBody>
@@ -4999,7 +5098,7 @@
                           </a:solidFill>
                           <a:latin typeface="Calibri"/>
                         </a:rPr>
-                        <a:t>Devedor</a:t>
+                        <a:t>Garantia</a:t>
                       </a:r>
                     </a:p>
                   </a:txBody>
@@ -5046,7 +5145,7 @@
                           </a:solidFill>
                           <a:latin typeface="Calibri"/>
                         </a:rPr>
-                        <a:t>Não localizado nas fontes acessíveis desta</a:t>
+                        <a:t>Pode ter garantia real ou fidejussória; não exige</a:t>
                       </a:r>
                     </a:p>
                     <a:p>
@@ -5068,7 +5167,7 @@
                           </a:solidFill>
                           <a:latin typeface="Calibri"/>
                         </a:rPr>
-                        <a:t>leitura</a:t>
+                        <a:t>garantia universal</a:t>
                       </a:r>
                     </a:p>
                   </a:txBody>
@@ -5115,29 +5214,7 @@
                           </a:solidFill>
                           <a:latin typeface="Calibri"/>
                         </a:rPr>
-                        <a:t>Não localizado nas cláusulas revisadas; requer</a:t>
-                      </a:r>
-                    </a:p>
-                    <a:p>
-                      <a:pPr algn="ctr">
-                        <a:lnSpc>
-                          <a:spcPct val="100000"/>
-                        </a:lnSpc>
-                        <a:spcBef>
-                          <a:spcPts val="0"/>
-                        </a:spcBef>
-                        <a:spcAft>
-                          <a:spcPts val="0"/>
-                        </a:spcAft>
-                      </a:pPr>
-                      <a:r>
-                        <a:rPr sz="1300" b="0">
-                          <a:solidFill>
-                            <a:srgbClr val="1F1F1F"/>
-                          </a:solidFill>
-                          <a:latin typeface="Calibri"/>
-                        </a:rPr>
-                        <a:t>documento aplicável</a:t>
+                        <a:t>-</a:t>
                       </a:r>
                     </a:p>
                   </a:txBody>
@@ -5160,7 +5237,7 @@
                   </a:tcPr>
                 </a:tc>
               </a:tr>
-              <a:tr h="470916">
+              <a:tr h="283464">
                 <a:tc>
                   <a:txBody>
                     <a:bodyPr wrap="square">
@@ -5186,7 +5263,7 @@
                           </a:solidFill>
                           <a:latin typeface="Calibri"/>
                         </a:rPr>
-                        <a:t>Garantia</a:t>
+                        <a:t>Elegibilidade</a:t>
                       </a:r>
                     </a:p>
                   </a:txBody>
@@ -5233,29 +5310,7 @@
                           </a:solidFill>
                           <a:latin typeface="Calibri"/>
                         </a:rPr>
-                        <a:t>Pode ter garantia real ou fidejussória; não exige</a:t>
-                      </a:r>
-                    </a:p>
-                    <a:p>
-                      <a:pPr algn="ctr">
-                        <a:lnSpc>
-                          <a:spcPct val="100000"/>
-                        </a:lnSpc>
-                        <a:spcBef>
-                          <a:spcPts val="0"/>
-                        </a:spcBef>
-                        <a:spcAft>
-                          <a:spcPts val="0"/>
-                        </a:spcAft>
-                      </a:pPr>
-                      <a:r>
-                        <a:rPr sz="1300" b="0">
-                          <a:solidFill>
-                            <a:srgbClr val="1F1F1F"/>
-                          </a:solidFill>
-                          <a:latin typeface="Calibri"/>
-                        </a:rPr>
-                        <a:t>garantia universal</a:t>
+                        <a:t>-</a:t>
                       </a:r>
                     </a:p>
                   </a:txBody>
@@ -5302,216 +5357,7 @@
                           </a:solidFill>
                           <a:latin typeface="Calibri"/>
                         </a:rPr>
-                        <a:t>Não localizado nas cláusulas revisadas; requer</a:t>
-                      </a:r>
-                    </a:p>
-                    <a:p>
-                      <a:pPr algn="ctr">
-                        <a:lnSpc>
-                          <a:spcPct val="100000"/>
-                        </a:lnSpc>
-                        <a:spcBef>
-                          <a:spcPts val="0"/>
-                        </a:spcBef>
-                        <a:spcAft>
-                          <a:spcPts val="0"/>
-                        </a:spcAft>
-                      </a:pPr>
-                      <a:r>
-                        <a:rPr sz="1300" b="0">
-                          <a:solidFill>
-                            <a:srgbClr val="1F1F1F"/>
-                          </a:solidFill>
-                          <a:latin typeface="Calibri"/>
-                        </a:rPr>
-                        <a:t>documento aplicável</a:t>
-                      </a:r>
-                    </a:p>
-                  </a:txBody>
-                  <a:tcPr marL="91440" marR="91440" marT="41148" marB="41148" anchor="ctr">
-                    <a:solidFill>
-                      <a:srgbClr val="FFFFFF"/>
-                    </a:solidFill>
-                    <a:lnL>
-                      <a:noFill/>
-                    </a:lnL>
-                    <a:lnR>
-                      <a:noFill/>
-                    </a:lnR>
-                    <a:lnT>
-                      <a:noFill/>
-                    </a:lnT>
-                    <a:lnB>
-                      <a:noFill/>
-                    </a:lnB>
-                  </a:tcPr>
-                </a:tc>
-              </a:tr>
-              <a:tr h="470916">
-                <a:tc>
-                  <a:txBody>
-                    <a:bodyPr wrap="square">
-                      <a:noAutofit/>
-                    </a:bodyPr>
-                    <a:lstStyle/>
-                    <a:p>
-                      <a:pPr algn="l">
-                        <a:lnSpc>
-                          <a:spcPct val="100000"/>
-                        </a:lnSpc>
-                        <a:spcBef>
-                          <a:spcPts val="0"/>
-                        </a:spcBef>
-                        <a:spcAft>
-                          <a:spcPts val="0"/>
-                        </a:spcAft>
-                      </a:pPr>
-                      <a:r>
-                        <a:rPr sz="1300" b="1">
-                          <a:solidFill>
-                            <a:srgbClr val="1F1F1F"/>
-                          </a:solidFill>
-                          <a:latin typeface="Calibri"/>
-                        </a:rPr>
-                        <a:t>Elegibilidade</a:t>
-                      </a:r>
-                    </a:p>
-                  </a:txBody>
-                  <a:tcPr marL="91440" marR="91440" marT="41148" marB="41148" anchor="ctr">
-                    <a:solidFill>
-                      <a:srgbClr val="FFFFFF"/>
-                    </a:solidFill>
-                    <a:lnL>
-                      <a:noFill/>
-                    </a:lnL>
-                    <a:lnR>
-                      <a:noFill/>
-                    </a:lnR>
-                    <a:lnT>
-                      <a:noFill/>
-                    </a:lnT>
-                    <a:lnB>
-                      <a:noFill/>
-                    </a:lnB>
-                  </a:tcPr>
-                </a:tc>
-                <a:tc>
-                  <a:txBody>
-                    <a:bodyPr wrap="square">
-                      <a:noAutofit/>
-                    </a:bodyPr>
-                    <a:lstStyle/>
-                    <a:p>
-                      <a:pPr algn="ctr">
-                        <a:lnSpc>
-                          <a:spcPct val="100000"/>
-                        </a:lnSpc>
-                        <a:spcBef>
-                          <a:spcPts val="0"/>
-                        </a:spcBef>
-                        <a:spcAft>
-                          <a:spcPts val="0"/>
-                        </a:spcAft>
-                      </a:pPr>
-                      <a:r>
-                        <a:rPr sz="1300" b="0">
-                          <a:solidFill>
-                            <a:srgbClr val="1F1F1F"/>
-                          </a:solidFill>
-                          <a:latin typeface="Calibri"/>
-                        </a:rPr>
-                        <a:t>Não localizado nas fontes acessíveis desta</a:t>
-                      </a:r>
-                    </a:p>
-                    <a:p>
-                      <a:pPr algn="ctr">
-                        <a:lnSpc>
-                          <a:spcPct val="100000"/>
-                        </a:lnSpc>
-                        <a:spcBef>
-                          <a:spcPts val="0"/>
-                        </a:spcBef>
-                        <a:spcAft>
-                          <a:spcPts val="0"/>
-                        </a:spcAft>
-                      </a:pPr>
-                      <a:r>
-                        <a:rPr sz="1300" b="0">
-                          <a:solidFill>
-                            <a:srgbClr val="1F1F1F"/>
-                          </a:solidFill>
-                          <a:latin typeface="Calibri"/>
-                        </a:rPr>
-                        <a:t>leitura</a:t>
-                      </a:r>
-                    </a:p>
-                  </a:txBody>
-                  <a:tcPr marL="91440" marR="91440" marT="41148" marB="41148" anchor="ctr">
-                    <a:solidFill>
-                      <a:srgbClr val="FFFFFF"/>
-                    </a:solidFill>
-                    <a:lnL>
-                      <a:noFill/>
-                    </a:lnL>
-                    <a:lnR>
-                      <a:noFill/>
-                    </a:lnR>
-                    <a:lnT>
-                      <a:noFill/>
-                    </a:lnT>
-                    <a:lnB>
-                      <a:noFill/>
-                    </a:lnB>
-                  </a:tcPr>
-                </a:tc>
-                <a:tc>
-                  <a:txBody>
-                    <a:bodyPr wrap="square">
-                      <a:noAutofit/>
-                    </a:bodyPr>
-                    <a:lstStyle/>
-                    <a:p>
-                      <a:pPr algn="ctr">
-                        <a:lnSpc>
-                          <a:spcPct val="100000"/>
-                        </a:lnSpc>
-                        <a:spcBef>
-                          <a:spcPts val="0"/>
-                        </a:spcBef>
-                        <a:spcAft>
-                          <a:spcPts val="0"/>
-                        </a:spcAft>
-                      </a:pPr>
-                      <a:r>
-                        <a:rPr sz="1300" b="0">
-                          <a:solidFill>
-                            <a:srgbClr val="1F1F1F"/>
-                          </a:solidFill>
-                          <a:latin typeface="Calibri"/>
-                        </a:rPr>
-                        <a:t>Não localizado nas cláusulas revisadas; requer</a:t>
-                      </a:r>
-                    </a:p>
-                    <a:p>
-                      <a:pPr algn="ctr">
-                        <a:lnSpc>
-                          <a:spcPct val="100000"/>
-                        </a:lnSpc>
-                        <a:spcBef>
-                          <a:spcPts val="0"/>
-                        </a:spcBef>
-                        <a:spcAft>
-                          <a:spcPts val="0"/>
-                        </a:spcAft>
-                      </a:pPr>
-                      <a:r>
-                        <a:rPr sz="1300" b="0">
-                          <a:solidFill>
-                            <a:srgbClr val="1F1F1F"/>
-                          </a:solidFill>
-                          <a:latin typeface="Calibri"/>
-                        </a:rPr>
-                        <a:t>documento aplicável</a:t>
+                        <a:t>-</a:t>
                       </a:r>
                     </a:p>
                   </a:txBody>
@@ -5680,29 +5526,7 @@
                           </a:solidFill>
                           <a:latin typeface="Calibri"/>
                         </a:rPr>
-                        <a:t>Não localizado nas cláusulas revisadas; requer</a:t>
-                      </a:r>
-                    </a:p>
-                    <a:p>
-                      <a:pPr algn="ctr">
-                        <a:lnSpc>
-                          <a:spcPct val="100000"/>
-                        </a:lnSpc>
-                        <a:spcBef>
-                          <a:spcPts val="0"/>
-                        </a:spcBef>
-                        <a:spcAft>
-                          <a:spcPts val="0"/>
-                        </a:spcAft>
-                      </a:pPr>
-                      <a:r>
-                        <a:rPr sz="1300" b="0">
-                          <a:solidFill>
-                            <a:srgbClr val="1F1F1F"/>
-                          </a:solidFill>
-                          <a:latin typeface="Calibri"/>
-                        </a:rPr>
-                        <a:t>documento aplicável</a:t>
+                        <a:t>-</a:t>
                       </a:r>
                     </a:p>
                   </a:txBody>
@@ -5872,7 +5696,7 @@
         </p:nvGraphicFramePr>
         <p:xfrm>
           <a:off x="438912" y="932688"/>
-          <a:ext cx="11313870" cy="2747772"/>
+          <a:ext cx="11313870" cy="2372868"/>
         </p:xfrm>
         <a:graphic>
           <a:graphicData uri="http://schemas.openxmlformats.org/drawingml/2006/table">
@@ -5907,7 +5731,7 @@
                       <a:r>
                         <a:rPr sz="1300" b="1">
                           <a:solidFill>
-                            <a:srgbClr val="1F1F1F"/>
+                            <a:srgbClr val="FFFFFF"/>
                           </a:solidFill>
                           <a:latin typeface="Calibri"/>
                         </a:rPr>
@@ -5917,7 +5741,7 @@
                   </a:txBody>
                   <a:tcPr marL="91440" marR="91440" marT="41148" marB="41148" anchor="ctr">
                     <a:solidFill>
-                      <a:srgbClr val="EC7000"/>
+                      <a:srgbClr val="FF6200"/>
                     </a:solidFill>
                     <a:lnL>
                       <a:noFill/>
@@ -5956,7 +5780,7 @@
                       <a:r>
                         <a:rPr sz="1300" b="1">
                           <a:solidFill>
-                            <a:srgbClr val="1F1F1F"/>
+                            <a:srgbClr val="FFFFFF"/>
                           </a:solidFill>
                           <a:latin typeface="Calibri"/>
                         </a:rPr>
@@ -5966,7 +5790,7 @@
                   </a:txBody>
                   <a:tcPr marL="91440" marR="91440" marT="41148" marB="41148" anchor="ctr">
                     <a:solidFill>
-                      <a:srgbClr val="EC7000"/>
+                      <a:srgbClr val="FF6200"/>
                     </a:solidFill>
                     <a:lnL>
                       <a:noFill/>
@@ -6005,7 +5829,7 @@
                       <a:r>
                         <a:rPr sz="1300" b="1">
                           <a:solidFill>
-                            <a:srgbClr val="1F1F1F"/>
+                            <a:srgbClr val="FFFFFF"/>
                           </a:solidFill>
                           <a:latin typeface="Calibri"/>
                         </a:rPr>
@@ -6015,7 +5839,7 @@
                   </a:txBody>
                   <a:tcPr marL="91440" marR="91440" marT="41148" marB="41148" anchor="ctr">
                     <a:solidFill>
-                      <a:srgbClr val="EC7000"/>
+                      <a:srgbClr val="FF6200"/>
                     </a:solidFill>
                     <a:lnL>
                       <a:noFill/>
@@ -6294,29 +6118,7 @@
                           </a:solidFill>
                           <a:latin typeface="Calibri"/>
                         </a:rPr>
-                        <a:t>Não localizado nas fontes acessíveis desta</a:t>
-                      </a:r>
-                    </a:p>
-                    <a:p>
-                      <a:pPr algn="ctr">
-                        <a:lnSpc>
-                          <a:spcPct val="100000"/>
-                        </a:lnSpc>
-                        <a:spcBef>
-                          <a:spcPts val="0"/>
-                        </a:spcBef>
-                        <a:spcAft>
-                          <a:spcPts val="0"/>
-                        </a:spcAft>
-                      </a:pPr>
-                      <a:r>
-                        <a:rPr sz="1300" b="0">
-                          <a:solidFill>
-                            <a:srgbClr val="1F1F1F"/>
-                          </a:solidFill>
-                          <a:latin typeface="Calibri"/>
-                        </a:rPr>
-                        <a:t>leitura</a:t>
+                        <a:t>-</a:t>
                       </a:r>
                     </a:p>
                   </a:txBody>
@@ -6363,9 +6165,83 @@
                           </a:solidFill>
                           <a:latin typeface="Calibri"/>
                         </a:rPr>
-                        <a:t>Não localizado nas cláusulas revisadas; requer</a:t>
-                      </a:r>
-                    </a:p>
+                        <a:t>-</a:t>
+                      </a:r>
+                    </a:p>
+                  </a:txBody>
+                  <a:tcPr marL="91440" marR="91440" marT="41148" marB="41148" anchor="ctr">
+                    <a:solidFill>
+                      <a:srgbClr val="FFFFFF"/>
+                    </a:solidFill>
+                    <a:lnL>
+                      <a:noFill/>
+                    </a:lnL>
+                    <a:lnR>
+                      <a:noFill/>
+                    </a:lnR>
+                    <a:lnT>
+                      <a:noFill/>
+                    </a:lnT>
+                    <a:lnB>
+                      <a:noFill/>
+                    </a:lnB>
+                  </a:tcPr>
+                </a:tc>
+              </a:tr>
+              <a:tr h="283464">
+                <a:tc>
+                  <a:txBody>
+                    <a:bodyPr wrap="square">
+                      <a:noAutofit/>
+                    </a:bodyPr>
+                    <a:lstStyle/>
+                    <a:p>
+                      <a:pPr algn="l">
+                        <a:lnSpc>
+                          <a:spcPct val="100000"/>
+                        </a:lnSpc>
+                        <a:spcBef>
+                          <a:spcPts val="0"/>
+                        </a:spcBef>
+                        <a:spcAft>
+                          <a:spcPts val="0"/>
+                        </a:spcAft>
+                      </a:pPr>
+                      <a:r>
+                        <a:rPr sz="1300" b="1">
+                          <a:solidFill>
+                            <a:srgbClr val="1F1F1F"/>
+                          </a:solidFill>
+                          <a:latin typeface="Calibri"/>
+                        </a:rPr>
+                        <a:t>Reserva de caixa</a:t>
+                      </a:r>
+                    </a:p>
+                  </a:txBody>
+                  <a:tcPr marL="91440" marR="91440" marT="41148" marB="41148" anchor="ctr">
+                    <a:solidFill>
+                      <a:srgbClr val="FFFFFF"/>
+                    </a:solidFill>
+                    <a:lnL>
+                      <a:noFill/>
+                    </a:lnL>
+                    <a:lnR>
+                      <a:noFill/>
+                    </a:lnR>
+                    <a:lnT>
+                      <a:noFill/>
+                    </a:lnT>
+                    <a:lnB>
+                      <a:noFill/>
+                    </a:lnB>
+                  </a:tcPr>
+                </a:tc>
+                <a:tc>
+                  <a:txBody>
+                    <a:bodyPr wrap="square">
+                      <a:noAutofit/>
+                    </a:bodyPr>
+                    <a:lstStyle/>
                     <a:p>
                       <a:pPr algn="ctr">
                         <a:lnSpc>
@@ -6385,7 +6261,54 @@
                           </a:solidFill>
                           <a:latin typeface="Calibri"/>
                         </a:rPr>
-                        <a:t>documento aplicável</a:t>
+                        <a:t>-</a:t>
+                      </a:r>
+                    </a:p>
+                  </a:txBody>
+                  <a:tcPr marL="91440" marR="91440" marT="41148" marB="41148" anchor="ctr">
+                    <a:solidFill>
+                      <a:srgbClr val="FFFFFF"/>
+                    </a:solidFill>
+                    <a:lnL>
+                      <a:noFill/>
+                    </a:lnL>
+                    <a:lnR>
+                      <a:noFill/>
+                    </a:lnR>
+                    <a:lnT>
+                      <a:noFill/>
+                    </a:lnT>
+                    <a:lnB>
+                      <a:noFill/>
+                    </a:lnB>
+                  </a:tcPr>
+                </a:tc>
+                <a:tc>
+                  <a:txBody>
+                    <a:bodyPr wrap="square">
+                      <a:noAutofit/>
+                    </a:bodyPr>
+                    <a:lstStyle/>
+                    <a:p>
+                      <a:pPr algn="ctr">
+                        <a:lnSpc>
+                          <a:spcPct val="100000"/>
+                        </a:lnSpc>
+                        <a:spcBef>
+                          <a:spcPts val="0"/>
+                        </a:spcBef>
+                        <a:spcAft>
+                          <a:spcPts val="0"/>
+                        </a:spcAft>
+                      </a:pPr>
+                      <a:r>
+                        <a:rPr sz="1300" b="0">
+                          <a:solidFill>
+                            <a:srgbClr val="1F1F1F"/>
+                          </a:solidFill>
+                          <a:latin typeface="Calibri"/>
+                        </a:rPr>
+                        <a:t>-</a:t>
                       </a:r>
                     </a:p>
                   </a:txBody>
@@ -6434,7 +6357,7 @@
                           </a:solidFill>
                           <a:latin typeface="Calibri"/>
                         </a:rPr>
-                        <a:t>Reserva de caixa</a:t>
+                        <a:t>Derivativos/hedge</a:t>
                       </a:r>
                     </a:p>
                   </a:txBody>
@@ -6481,29 +6404,7 @@
                           </a:solidFill>
                           <a:latin typeface="Calibri"/>
                         </a:rPr>
-                        <a:t>Não localizado nas fontes acessíveis desta</a:t>
-                      </a:r>
-                    </a:p>
-                    <a:p>
-                      <a:pPr algn="ctr">
-                        <a:lnSpc>
-                          <a:spcPct val="100000"/>
-                        </a:lnSpc>
-                        <a:spcBef>
-                          <a:spcPts val="0"/>
-                        </a:spcBef>
-                        <a:spcAft>
-                          <a:spcPts val="0"/>
-                        </a:spcAft>
-                      </a:pPr>
-                      <a:r>
-                        <a:rPr sz="1300" b="0">
-                          <a:solidFill>
-                            <a:srgbClr val="1F1F1F"/>
-                          </a:solidFill>
-                          <a:latin typeface="Calibri"/>
-                        </a:rPr>
-                        <a:t>leitura</a:t>
+                        <a:t>Proteção patrimonial com contraparte central</a:t>
                       </a:r>
                     </a:p>
                   </a:txBody>
@@ -6550,7 +6451,7 @@
                           </a:solidFill>
                           <a:latin typeface="Calibri"/>
                         </a:rPr>
-                        <a:t>Não localizado nas cláusulas revisadas; requer</a:t>
+                        <a:t>Proteção patrimonial exclusivamente, com</a:t>
                       </a:r>
                     </a:p>
                     <a:p>
@@ -6572,7 +6473,7 @@
                           </a:solidFill>
                           <a:latin typeface="Calibri"/>
                         </a:rPr>
-                        <a:t>documento aplicável</a:t>
+                        <a:t>contraparte central</a:t>
                       </a:r>
                     </a:p>
                   </a:txBody>
@@ -6595,172 +6496,7 @@
                   </a:tcPr>
                 </a:tc>
               </a:tr>
-              <a:tr h="470916">
-                <a:tc>
-                  <a:txBody>
-                    <a:bodyPr wrap="square">
-                      <a:noAutofit/>
-                    </a:bodyPr>
-                    <a:lstStyle/>
-                    <a:p>
-                      <a:pPr algn="l">
-                        <a:lnSpc>
-                          <a:spcPct val="100000"/>
-                        </a:lnSpc>
-                        <a:spcBef>
-                          <a:spcPts val="0"/>
-                        </a:spcBef>
-                        <a:spcAft>
-                          <a:spcPts val="0"/>
-                        </a:spcAft>
-                      </a:pPr>
-                      <a:r>
-                        <a:rPr sz="1300" b="1">
-                          <a:solidFill>
-                            <a:srgbClr val="1F1F1F"/>
-                          </a:solidFill>
-                          <a:latin typeface="Calibri"/>
-                        </a:rPr>
-                        <a:t>Derivativos/hedge</a:t>
-                      </a:r>
-                    </a:p>
-                  </a:txBody>
-                  <a:tcPr marL="91440" marR="91440" marT="41148" marB="41148" anchor="ctr">
-                    <a:solidFill>
-                      <a:srgbClr val="FFFFFF"/>
-                    </a:solidFill>
-                    <a:lnL>
-                      <a:noFill/>
-                    </a:lnL>
-                    <a:lnR>
-                      <a:noFill/>
-                    </a:lnR>
-                    <a:lnT>
-                      <a:noFill/>
-                    </a:lnT>
-                    <a:lnB>
-                      <a:noFill/>
-                    </a:lnB>
-                  </a:tcPr>
-                </a:tc>
-                <a:tc>
-                  <a:txBody>
-                    <a:bodyPr wrap="square">
-                      <a:noAutofit/>
-                    </a:bodyPr>
-                    <a:lstStyle/>
-                    <a:p>
-                      <a:pPr algn="ctr">
-                        <a:lnSpc>
-                          <a:spcPct val="100000"/>
-                        </a:lnSpc>
-                        <a:spcBef>
-                          <a:spcPts val="0"/>
-                        </a:spcBef>
-                        <a:spcAft>
-                          <a:spcPts val="0"/>
-                        </a:spcAft>
-                      </a:pPr>
-                      <a:r>
-                        <a:rPr sz="1300" b="0">
-                          <a:solidFill>
-                            <a:srgbClr val="1F1F1F"/>
-                          </a:solidFill>
-                          <a:latin typeface="Calibri"/>
-                        </a:rPr>
-                        <a:t>Proteção patrimonial com contraparte central</a:t>
-                      </a:r>
-                    </a:p>
-                  </a:txBody>
-                  <a:tcPr marL="91440" marR="91440" marT="41148" marB="41148" anchor="ctr">
-                    <a:solidFill>
-                      <a:srgbClr val="FFFFFF"/>
-                    </a:solidFill>
-                    <a:lnL>
-                      <a:noFill/>
-                    </a:lnL>
-                    <a:lnR>
-                      <a:noFill/>
-                    </a:lnR>
-                    <a:lnT>
-                      <a:noFill/>
-                    </a:lnT>
-                    <a:lnB>
-                      <a:noFill/>
-                    </a:lnB>
-                  </a:tcPr>
-                </a:tc>
-                <a:tc>
-                  <a:txBody>
-                    <a:bodyPr wrap="square">
-                      <a:noAutofit/>
-                    </a:bodyPr>
-                    <a:lstStyle/>
-                    <a:p>
-                      <a:pPr algn="ctr">
-                        <a:lnSpc>
-                          <a:spcPct val="100000"/>
-                        </a:lnSpc>
-                        <a:spcBef>
-                          <a:spcPts val="0"/>
-                        </a:spcBef>
-                        <a:spcAft>
-                          <a:spcPts val="0"/>
-                        </a:spcAft>
-                      </a:pPr>
-                      <a:r>
-                        <a:rPr sz="1300" b="0">
-                          <a:solidFill>
-                            <a:srgbClr val="1F1F1F"/>
-                          </a:solidFill>
-                          <a:latin typeface="Calibri"/>
-                        </a:rPr>
-                        <a:t>Proteção patrimonial exclusivamente, com</a:t>
-                      </a:r>
-                    </a:p>
-                    <a:p>
-                      <a:pPr algn="ctr">
-                        <a:lnSpc>
-                          <a:spcPct val="100000"/>
-                        </a:lnSpc>
-                        <a:spcBef>
-                          <a:spcPts val="0"/>
-                        </a:spcBef>
-                        <a:spcAft>
-                          <a:spcPts val="0"/>
-                        </a:spcAft>
-                      </a:pPr>
-                      <a:r>
-                        <a:rPr sz="1300" b="0">
-                          <a:solidFill>
-                            <a:srgbClr val="1F1F1F"/>
-                          </a:solidFill>
-                          <a:latin typeface="Calibri"/>
-                        </a:rPr>
-                        <a:t>contraparte central</a:t>
-                      </a:r>
-                    </a:p>
-                  </a:txBody>
-                  <a:tcPr marL="91440" marR="91440" marT="41148" marB="41148" anchor="ctr">
-                    <a:solidFill>
-                      <a:srgbClr val="FFFFFF"/>
-                    </a:solidFill>
-                    <a:lnL>
-                      <a:noFill/>
-                    </a:lnL>
-                    <a:lnR>
-                      <a:noFill/>
-                    </a:lnR>
-                    <a:lnT>
-                      <a:noFill/>
-                    </a:lnT>
-                    <a:lnB>
-                      <a:noFill/>
-                    </a:lnB>
-                  </a:tcPr>
-                </a:tc>
-              </a:tr>
-              <a:tr h="470916">
+              <a:tr h="283464">
                 <a:tc>
                   <a:txBody>
                     <a:bodyPr wrap="square">
@@ -6835,29 +6571,7 @@
                           </a:solidFill>
                           <a:latin typeface="Calibri"/>
                         </a:rPr>
-                        <a:t>Não localizado nas fontes acessíveis desta</a:t>
-                      </a:r>
-                    </a:p>
-                    <a:p>
-                      <a:pPr algn="ctr">
-                        <a:lnSpc>
-                          <a:spcPct val="100000"/>
-                        </a:lnSpc>
-                        <a:spcBef>
-                          <a:spcPts val="0"/>
-                        </a:spcBef>
-                        <a:spcAft>
-                          <a:spcPts val="0"/>
-                        </a:spcAft>
-                      </a:pPr>
-                      <a:r>
-                        <a:rPr sz="1300" b="0">
-                          <a:solidFill>
-                            <a:srgbClr val="1F1F1F"/>
-                          </a:solidFill>
-                          <a:latin typeface="Calibri"/>
-                        </a:rPr>
-                        <a:t>leitura</a:t>
+                        <a:t>-</a:t>
                       </a:r>
                     </a:p>
                   </a:txBody>
@@ -6906,29 +6620,7 @@
                           </a:solidFill>
                           <a:latin typeface="Calibri"/>
                         </a:rPr>
-                        <a:t>Não localizado nas cláusulas revisadas; requer</a:t>
-                      </a:r>
-                    </a:p>
-                    <a:p>
-                      <a:pPr algn="ctr">
-                        <a:lnSpc>
-                          <a:spcPct val="100000"/>
-                        </a:lnSpc>
-                        <a:spcBef>
-                          <a:spcPts val="0"/>
-                        </a:spcBef>
-                        <a:spcAft>
-                          <a:spcPts val="0"/>
-                        </a:spcAft>
-                      </a:pPr>
-                      <a:r>
-                        <a:rPr sz="1300" b="0">
-                          <a:solidFill>
-                            <a:srgbClr val="1F1F1F"/>
-                          </a:solidFill>
-                          <a:latin typeface="Calibri"/>
-                        </a:rPr>
-                        <a:t>documento aplicável</a:t>
+                        <a:t>-</a:t>
                       </a:r>
                     </a:p>
                   </a:txBody>
@@ -7098,7 +6790,7 @@
         </p:nvGraphicFramePr>
         <p:xfrm>
           <a:off x="438912" y="932688"/>
-          <a:ext cx="11313870" cy="3218688"/>
+          <a:ext cx="11313870" cy="2468880"/>
         </p:xfrm>
         <a:graphic>
           <a:graphicData uri="http://schemas.openxmlformats.org/drawingml/2006/table">
@@ -7133,7 +6825,7 @@
                       <a:r>
                         <a:rPr sz="1300" b="1">
                           <a:solidFill>
-                            <a:srgbClr val="1F1F1F"/>
+                            <a:srgbClr val="FFFFFF"/>
                           </a:solidFill>
                           <a:latin typeface="Calibri"/>
                         </a:rPr>
@@ -7143,7 +6835,7 @@
                   </a:txBody>
                   <a:tcPr marL="91440" marR="91440" marT="41148" marB="41148" anchor="ctr">
                     <a:solidFill>
-                      <a:srgbClr val="EC7000"/>
+                      <a:srgbClr val="FF6200"/>
                     </a:solidFill>
                     <a:lnL>
                       <a:noFill/>
@@ -7182,7 +6874,7 @@
                       <a:r>
                         <a:rPr sz="1300" b="1">
                           <a:solidFill>
-                            <a:srgbClr val="1F1F1F"/>
+                            <a:srgbClr val="FFFFFF"/>
                           </a:solidFill>
                           <a:latin typeface="Calibri"/>
                         </a:rPr>
@@ -7192,7 +6884,7 @@
                   </a:txBody>
                   <a:tcPr marL="91440" marR="91440" marT="41148" marB="41148" anchor="ctr">
                     <a:solidFill>
-                      <a:srgbClr val="EC7000"/>
+                      <a:srgbClr val="FF6200"/>
                     </a:solidFill>
                     <a:lnL>
                       <a:noFill/>
@@ -7231,7 +6923,7 @@
                       <a:r>
                         <a:rPr sz="1300" b="1">
                           <a:solidFill>
-                            <a:srgbClr val="1F1F1F"/>
+                            <a:srgbClr val="FFFFFF"/>
                           </a:solidFill>
                           <a:latin typeface="Calibri"/>
                         </a:rPr>
@@ -7241,7 +6933,7 @@
                   </a:txBody>
                   <a:tcPr marL="91440" marR="91440" marT="41148" marB="41148" anchor="ctr">
                     <a:solidFill>
-                      <a:srgbClr val="EC7000"/>
+                      <a:srgbClr val="FF6200"/>
                     </a:solidFill>
                     <a:lnL>
                       <a:noFill/>
@@ -7256,6 +6948,149 @@
                       <a:solidFill>
                         <a:srgbClr val="D9DEE5"/>
                       </a:solidFill>
+                    </a:lnB>
+                  </a:tcPr>
+                </a:tc>
+              </a:tr>
+              <a:tr h="283464">
+                <a:tc>
+                  <a:txBody>
+                    <a:bodyPr wrap="square">
+                      <a:noAutofit/>
+                    </a:bodyPr>
+                    <a:lstStyle/>
+                    <a:p>
+                      <a:pPr algn="l">
+                        <a:lnSpc>
+                          <a:spcPct val="100000"/>
+                        </a:lnSpc>
+                        <a:spcBef>
+                          <a:spcPts val="0"/>
+                        </a:spcBef>
+                        <a:spcAft>
+                          <a:spcPts val="0"/>
+                        </a:spcAft>
+                      </a:pPr>
+                      <a:r>
+                        <a:rPr sz="1300" b="1">
+                          <a:solidFill>
+                            <a:srgbClr val="1F1F1F"/>
+                          </a:solidFill>
+                          <a:latin typeface="Calibri"/>
+                        </a:rPr>
+                        <a:t>Alocação mínima</a:t>
+                      </a:r>
+                    </a:p>
+                  </a:txBody>
+                  <a:tcPr marL="91440" marR="91440" marT="41148" marB="41148" anchor="ctr">
+                    <a:solidFill>
+                      <a:srgbClr val="FFFFFF"/>
+                    </a:solidFill>
+                    <a:lnL>
+                      <a:noFill/>
+                    </a:lnL>
+                    <a:lnR>
+                      <a:noFill/>
+                    </a:lnR>
+                    <a:lnT>
+                      <a:noFill/>
+                    </a:lnT>
+                    <a:lnB>
+                      <a:noFill/>
+                    </a:lnB>
+                  </a:tcPr>
+                </a:tc>
+                <a:tc>
+                  <a:txBody>
+                    <a:bodyPr wrap="square">
+                      <a:noAutofit/>
+                    </a:bodyPr>
+                    <a:lstStyle/>
+                    <a:p>
+                      <a:pPr algn="ctr">
+                        <a:lnSpc>
+                          <a:spcPct val="100000"/>
+                        </a:lnSpc>
+                        <a:spcBef>
+                          <a:spcPts val="0"/>
+                        </a:spcBef>
+                        <a:spcAft>
+                          <a:spcPts val="0"/>
+                        </a:spcAft>
+                      </a:pPr>
+                      <a:r>
+                        <a:rPr sz="1300" b="0">
+                          <a:solidFill>
+                            <a:srgbClr val="1F1F1F"/>
+                          </a:solidFill>
+                          <a:latin typeface="Calibri"/>
+                        </a:rPr>
+                        <a:t>Direitos creditórios≥67% PL após 180 dias</a:t>
+                      </a:r>
+                    </a:p>
+                  </a:txBody>
+                  <a:tcPr marL="91440" marR="91440" marT="41148" marB="41148" anchor="ctr">
+                    <a:solidFill>
+                      <a:srgbClr val="FFFFFF"/>
+                    </a:solidFill>
+                    <a:lnL>
+                      <a:noFill/>
+                    </a:lnL>
+                    <a:lnR>
+                      <a:noFill/>
+                    </a:lnR>
+                    <a:lnT>
+                      <a:noFill/>
+                    </a:lnT>
+                    <a:lnB>
+                      <a:noFill/>
+                    </a:lnB>
+                  </a:tcPr>
+                </a:tc>
+                <a:tc>
+                  <a:txBody>
+                    <a:bodyPr wrap="square">
+                      <a:noAutofit/>
+                    </a:bodyPr>
+                    <a:lstStyle/>
+                    <a:p>
+                      <a:pPr algn="ctr">
+                        <a:lnSpc>
+                          <a:spcPct val="100000"/>
+                        </a:lnSpc>
+                        <a:spcBef>
+                          <a:spcPts val="0"/>
+                        </a:spcBef>
+                        <a:spcAft>
+                          <a:spcPts val="0"/>
+                        </a:spcAft>
+                      </a:pPr>
+                      <a:r>
+                        <a:rPr sz="1300" b="0">
+                          <a:solidFill>
+                            <a:srgbClr val="1F1F1F"/>
+                          </a:solidFill>
+                          <a:latin typeface="Calibri"/>
+                        </a:rPr>
+                        <a:t>-</a:t>
+                      </a:r>
+                    </a:p>
+                  </a:txBody>
+                  <a:tcPr marL="91440" marR="91440" marT="41148" marB="41148" anchor="ctr">
+                    <a:solidFill>
+                      <a:srgbClr val="FFFFFF"/>
+                    </a:solidFill>
+                    <a:lnL>
+                      <a:noFill/>
+                    </a:lnL>
+                    <a:lnR>
+                      <a:noFill/>
+                    </a:lnR>
+                    <a:lnT>
+                      <a:noFill/>
+                    </a:lnT>
+                    <a:lnB>
+                      <a:noFill/>
                     </a:lnB>
                   </a:tcPr>
                 </a:tc>
@@ -7286,7 +7121,7 @@
                           </a:solidFill>
                           <a:latin typeface="Calibri"/>
                         </a:rPr>
-                        <a:t>Alocação mínima</a:t>
+                        <a:t>Pool/revolvência</a:t>
                       </a:r>
                     </a:p>
                   </a:txBody>
@@ -7333,7 +7168,29 @@
                           </a:solidFill>
                           <a:latin typeface="Calibri"/>
                         </a:rPr>
-                        <a:t>Direitos creditórios≥67% PL após 180 dias</a:t>
+                        <a:t>Revolvência durante duração da classe, conforme</a:t>
+                      </a:r>
+                    </a:p>
+                    <a:p>
+                      <a:pPr algn="ctr">
+                        <a:lnSpc>
+                          <a:spcPct val="100000"/>
+                        </a:lnSpc>
+                        <a:spcBef>
+                          <a:spcPts val="0"/>
+                        </a:spcBef>
+                        <a:spcAft>
+                          <a:spcPts val="0"/>
+                        </a:spcAft>
+                      </a:pPr>
+                      <a:r>
+                        <a:rPr sz="1300" b="0">
+                          <a:solidFill>
+                            <a:srgbClr val="1F1F1F"/>
+                          </a:solidFill>
+                          <a:latin typeface="Calibri"/>
+                        </a:rPr>
+                        <a:t>ordem de alocação</a:t>
                       </a:r>
                     </a:p>
                   </a:txBody>
@@ -7380,9 +7237,83 @@
                           </a:solidFill>
                           <a:latin typeface="Calibri"/>
                         </a:rPr>
-                        <a:t>Não localizado nas cláusulas revisadas; requer</a:t>
-                      </a:r>
-                    </a:p>
+                        <a:t>-</a:t>
+                      </a:r>
+                    </a:p>
+                  </a:txBody>
+                  <a:tcPr marL="91440" marR="91440" marT="41148" marB="41148" anchor="ctr">
+                    <a:solidFill>
+                      <a:srgbClr val="FFFFFF"/>
+                    </a:solidFill>
+                    <a:lnL>
+                      <a:noFill/>
+                    </a:lnL>
+                    <a:lnR>
+                      <a:noFill/>
+                    </a:lnR>
+                    <a:lnT>
+                      <a:noFill/>
+                    </a:lnT>
+                    <a:lnB>
+                      <a:noFill/>
+                    </a:lnB>
+                  </a:tcPr>
+                </a:tc>
+              </a:tr>
+              <a:tr h="283464">
+                <a:tc>
+                  <a:txBody>
+                    <a:bodyPr wrap="square">
+                      <a:noAutofit/>
+                    </a:bodyPr>
+                    <a:lstStyle/>
+                    <a:p>
+                      <a:pPr algn="l">
+                        <a:lnSpc>
+                          <a:spcPct val="100000"/>
+                        </a:lnSpc>
+                        <a:spcBef>
+                          <a:spcPts val="0"/>
+                        </a:spcBef>
+                        <a:spcAft>
+                          <a:spcPts val="0"/>
+                        </a:spcAft>
+                      </a:pPr>
+                      <a:r>
+                        <a:rPr sz="1300" b="1">
+                          <a:solidFill>
+                            <a:srgbClr val="1F1F1F"/>
+                          </a:solidFill>
+                          <a:latin typeface="Calibri"/>
+                        </a:rPr>
+                        <a:t>Duração/público-alvo</a:t>
+                      </a:r>
+                    </a:p>
+                  </a:txBody>
+                  <a:tcPr marL="91440" marR="91440" marT="41148" marB="41148" anchor="ctr">
+                    <a:solidFill>
+                      <a:srgbClr val="FFFFFF"/>
+                    </a:solidFill>
+                    <a:lnL>
+                      <a:noFill/>
+                    </a:lnL>
+                    <a:lnR>
+                      <a:noFill/>
+                    </a:lnR>
+                    <a:lnT>
+                      <a:noFill/>
+                    </a:lnT>
+                    <a:lnB>
+                      <a:noFill/>
+                    </a:lnB>
+                  </a:tcPr>
+                </a:tc>
+                <a:tc>
+                  <a:txBody>
+                    <a:bodyPr wrap="square">
+                      <a:noAutofit/>
+                    </a:bodyPr>
+                    <a:lstStyle/>
                     <a:p>
                       <a:pPr algn="ctr">
                         <a:lnSpc>
@@ -7402,7 +7333,197 @@
                           </a:solidFill>
                           <a:latin typeface="Calibri"/>
                         </a:rPr>
-                        <a:t>documento aplicável</a:t>
+                        <a:t>-</a:t>
+                      </a:r>
+                    </a:p>
+                  </a:txBody>
+                  <a:tcPr marL="91440" marR="91440" marT="41148" marB="41148" anchor="ctr">
+                    <a:solidFill>
+                      <a:srgbClr val="FFFFFF"/>
+                    </a:solidFill>
+                    <a:lnL>
+                      <a:noFill/>
+                    </a:lnL>
+                    <a:lnR>
+                      <a:noFill/>
+                    </a:lnR>
+                    <a:lnT>
+                      <a:noFill/>
+                    </a:lnT>
+                    <a:lnB>
+                      <a:noFill/>
+                    </a:lnB>
+                  </a:tcPr>
+                </a:tc>
+                <a:tc>
+                  <a:txBody>
+                    <a:bodyPr wrap="square">
+                      <a:noAutofit/>
+                    </a:bodyPr>
+                    <a:lstStyle/>
+                    <a:p>
+                      <a:pPr algn="ctr">
+                        <a:lnSpc>
+                          <a:spcPct val="100000"/>
+                        </a:lnSpc>
+                        <a:spcBef>
+                          <a:spcPts val="0"/>
+                        </a:spcBef>
+                        <a:spcAft>
+                          <a:spcPts val="0"/>
+                        </a:spcAft>
+                      </a:pPr>
+                      <a:r>
+                        <a:rPr sz="1300" b="0">
+                          <a:solidFill>
+                            <a:srgbClr val="1F1F1F"/>
+                          </a:solidFill>
+                          <a:latin typeface="Calibri"/>
+                        </a:rPr>
+                        <a:t>-</a:t>
+                      </a:r>
+                    </a:p>
+                  </a:txBody>
+                  <a:tcPr marL="91440" marR="91440" marT="41148" marB="41148" anchor="ctr">
+                    <a:solidFill>
+                      <a:srgbClr val="FFFFFF"/>
+                    </a:solidFill>
+                    <a:lnL>
+                      <a:noFill/>
+                    </a:lnL>
+                    <a:lnR>
+                      <a:noFill/>
+                    </a:lnR>
+                    <a:lnT>
+                      <a:noFill/>
+                    </a:lnT>
+                    <a:lnB>
+                      <a:noFill/>
+                    </a:lnB>
+                  </a:tcPr>
+                </a:tc>
+              </a:tr>
+              <a:tr h="283464">
+                <a:tc>
+                  <a:txBody>
+                    <a:bodyPr wrap="square">
+                      <a:noAutofit/>
+                    </a:bodyPr>
+                    <a:lstStyle/>
+                    <a:p>
+                      <a:pPr algn="l">
+                        <a:lnSpc>
+                          <a:spcPct val="100000"/>
+                        </a:lnSpc>
+                        <a:spcBef>
+                          <a:spcPts val="0"/>
+                        </a:spcBef>
+                        <a:spcAft>
+                          <a:spcPts val="0"/>
+                        </a:spcAft>
+                      </a:pPr>
+                      <a:r>
+                        <a:rPr sz="1300" b="1">
+                          <a:solidFill>
+                            <a:srgbClr val="1F1F1F"/>
+                          </a:solidFill>
+                          <a:latin typeface="Calibri"/>
+                        </a:rPr>
+                        <a:t>Cessão/recompra</a:t>
+                      </a:r>
+                    </a:p>
+                  </a:txBody>
+                  <a:tcPr marL="91440" marR="91440" marT="41148" marB="41148" anchor="ctr">
+                    <a:solidFill>
+                      <a:srgbClr val="FFFFFF"/>
+                    </a:solidFill>
+                    <a:lnL>
+                      <a:noFill/>
+                    </a:lnL>
+                    <a:lnR>
+                      <a:noFill/>
+                    </a:lnR>
+                    <a:lnT>
+                      <a:noFill/>
+                    </a:lnT>
+                    <a:lnB>
+                      <a:noFill/>
+                    </a:lnB>
+                  </a:tcPr>
+                </a:tc>
+                <a:tc>
+                  <a:txBody>
+                    <a:bodyPr wrap="square">
+                      <a:noAutofit/>
+                    </a:bodyPr>
+                    <a:lstStyle/>
+                    <a:p>
+                      <a:pPr algn="ctr">
+                        <a:lnSpc>
+                          <a:spcPct val="100000"/>
+                        </a:lnSpc>
+                        <a:spcBef>
+                          <a:spcPts val="0"/>
+                        </a:spcBef>
+                        <a:spcAft>
+                          <a:spcPts val="0"/>
+                        </a:spcAft>
+                      </a:pPr>
+                      <a:r>
+                        <a:rPr sz="1300" b="0">
+                          <a:solidFill>
+                            <a:srgbClr val="1F1F1F"/>
+                          </a:solidFill>
+                          <a:latin typeface="Calibri"/>
+                        </a:rPr>
+                        <a:t>Cessão definitiva, irrevogável e irretratável</a:t>
+                      </a:r>
+                    </a:p>
+                  </a:txBody>
+                  <a:tcPr marL="91440" marR="91440" marT="41148" marB="41148" anchor="ctr">
+                    <a:solidFill>
+                      <a:srgbClr val="FFFFFF"/>
+                    </a:solidFill>
+                    <a:lnL>
+                      <a:noFill/>
+                    </a:lnL>
+                    <a:lnR>
+                      <a:noFill/>
+                    </a:lnR>
+                    <a:lnT>
+                      <a:noFill/>
+                    </a:lnT>
+                    <a:lnB>
+                      <a:noFill/>
+                    </a:lnB>
+                  </a:tcPr>
+                </a:tc>
+                <a:tc>
+                  <a:txBody>
+                    <a:bodyPr wrap="square">
+                      <a:noAutofit/>
+                    </a:bodyPr>
+                    <a:lstStyle/>
+                    <a:p>
+                      <a:pPr algn="ctr">
+                        <a:lnSpc>
+                          <a:spcPct val="100000"/>
+                        </a:lnSpc>
+                        <a:spcBef>
+                          <a:spcPts val="0"/>
+                        </a:spcBef>
+                        <a:spcAft>
+                          <a:spcPts val="0"/>
+                        </a:spcAft>
+                      </a:pPr>
+                      <a:r>
+                        <a:rPr sz="1300" b="0">
+                          <a:solidFill>
+                            <a:srgbClr val="1F1F1F"/>
+                          </a:solidFill>
+                          <a:latin typeface="Calibri"/>
+                        </a:rPr>
+                        <a:t>-</a:t>
                       </a:r>
                     </a:p>
                   </a:txBody>
@@ -7451,7 +7572,7 @@
                           </a:solidFill>
                           <a:latin typeface="Calibri"/>
                         </a:rPr>
-                        <a:t>Pool/revolvência</a:t>
+                        <a:t>Coobrigação</a:t>
                       </a:r>
                     </a:p>
                   </a:txBody>
@@ -7498,7 +7619,7 @@
                           </a:solidFill>
                           <a:latin typeface="Calibri"/>
                         </a:rPr>
-                        <a:t>Revolvência durante duração da classe, conforme</a:t>
+                        <a:t>Aquisição com ou sem coobrigação do cedente ou</a:t>
                       </a:r>
                     </a:p>
                     <a:p>
@@ -7520,7 +7641,7 @@
                           </a:solidFill>
                           <a:latin typeface="Calibri"/>
                         </a:rPr>
-                        <a:t>ordem de alocação</a:t>
+                        <a:t>terceiros</a:t>
                       </a:r>
                     </a:p>
                   </a:txBody>
@@ -7567,29 +7688,7 @@
                           </a:solidFill>
                           <a:latin typeface="Calibri"/>
                         </a:rPr>
-                        <a:t>Não localizado nas cláusulas revisadas; requer</a:t>
-                      </a:r>
-                    </a:p>
-                    <a:p>
-                      <a:pPr algn="ctr">
-                        <a:lnSpc>
-                          <a:spcPct val="100000"/>
-                        </a:lnSpc>
-                        <a:spcBef>
-                          <a:spcPts val="0"/>
-                        </a:spcBef>
-                        <a:spcAft>
-                          <a:spcPts val="0"/>
-                        </a:spcAft>
-                      </a:pPr>
-                      <a:r>
-                        <a:rPr sz="1300" b="0">
-                          <a:solidFill>
-                            <a:srgbClr val="1F1F1F"/>
-                          </a:solidFill>
-                          <a:latin typeface="Calibri"/>
-                        </a:rPr>
-                        <a:t>documento aplicável</a:t>
+                        <a:t>-</a:t>
                       </a:r>
                     </a:p>
                   </a:txBody>
@@ -7612,546 +7711,7 @@
                   </a:tcPr>
                 </a:tc>
               </a:tr>
-              <a:tr h="470916">
-                <a:tc>
-                  <a:txBody>
-                    <a:bodyPr wrap="square">
-                      <a:noAutofit/>
-                    </a:bodyPr>
-                    <a:lstStyle/>
-                    <a:p>
-                      <a:pPr algn="l">
-                        <a:lnSpc>
-                          <a:spcPct val="100000"/>
-                        </a:lnSpc>
-                        <a:spcBef>
-                          <a:spcPts val="0"/>
-                        </a:spcBef>
-                        <a:spcAft>
-                          <a:spcPts val="0"/>
-                        </a:spcAft>
-                      </a:pPr>
-                      <a:r>
-                        <a:rPr sz="1300" b="1">
-                          <a:solidFill>
-                            <a:srgbClr val="1F1F1F"/>
-                          </a:solidFill>
-                          <a:latin typeface="Calibri"/>
-                        </a:rPr>
-                        <a:t>Duração/público-alvo</a:t>
-                      </a:r>
-                    </a:p>
-                  </a:txBody>
-                  <a:tcPr marL="91440" marR="91440" marT="41148" marB="41148" anchor="ctr">
-                    <a:solidFill>
-                      <a:srgbClr val="FFFFFF"/>
-                    </a:solidFill>
-                    <a:lnL>
-                      <a:noFill/>
-                    </a:lnL>
-                    <a:lnR>
-                      <a:noFill/>
-                    </a:lnR>
-                    <a:lnT>
-                      <a:noFill/>
-                    </a:lnT>
-                    <a:lnB>
-                      <a:noFill/>
-                    </a:lnB>
-                  </a:tcPr>
-                </a:tc>
-                <a:tc>
-                  <a:txBody>
-                    <a:bodyPr wrap="square">
-                      <a:noAutofit/>
-                    </a:bodyPr>
-                    <a:lstStyle/>
-                    <a:p>
-                      <a:pPr algn="ctr">
-                        <a:lnSpc>
-                          <a:spcPct val="100000"/>
-                        </a:lnSpc>
-                        <a:spcBef>
-                          <a:spcPts val="0"/>
-                        </a:spcBef>
-                        <a:spcAft>
-                          <a:spcPts val="0"/>
-                        </a:spcAft>
-                      </a:pPr>
-                      <a:r>
-                        <a:rPr sz="1300" b="0">
-                          <a:solidFill>
-                            <a:srgbClr val="1F1F1F"/>
-                          </a:solidFill>
-                          <a:latin typeface="Calibri"/>
-                        </a:rPr>
-                        <a:t>Não localizado nas fontes acessíveis desta</a:t>
-                      </a:r>
-                    </a:p>
-                    <a:p>
-                      <a:pPr algn="ctr">
-                        <a:lnSpc>
-                          <a:spcPct val="100000"/>
-                        </a:lnSpc>
-                        <a:spcBef>
-                          <a:spcPts val="0"/>
-                        </a:spcBef>
-                        <a:spcAft>
-                          <a:spcPts val="0"/>
-                        </a:spcAft>
-                      </a:pPr>
-                      <a:r>
-                        <a:rPr sz="1300" b="0">
-                          <a:solidFill>
-                            <a:srgbClr val="1F1F1F"/>
-                          </a:solidFill>
-                          <a:latin typeface="Calibri"/>
-                        </a:rPr>
-                        <a:t>leitura</a:t>
-                      </a:r>
-                    </a:p>
-                  </a:txBody>
-                  <a:tcPr marL="91440" marR="91440" marT="41148" marB="41148" anchor="ctr">
-                    <a:solidFill>
-                      <a:srgbClr val="FFFFFF"/>
-                    </a:solidFill>
-                    <a:lnL>
-                      <a:noFill/>
-                    </a:lnL>
-                    <a:lnR>
-                      <a:noFill/>
-                    </a:lnR>
-                    <a:lnT>
-                      <a:noFill/>
-                    </a:lnT>
-                    <a:lnB>
-                      <a:noFill/>
-                    </a:lnB>
-                  </a:tcPr>
-                </a:tc>
-                <a:tc>
-                  <a:txBody>
-                    <a:bodyPr wrap="square">
-                      <a:noAutofit/>
-                    </a:bodyPr>
-                    <a:lstStyle/>
-                    <a:p>
-                      <a:pPr algn="ctr">
-                        <a:lnSpc>
-                          <a:spcPct val="100000"/>
-                        </a:lnSpc>
-                        <a:spcBef>
-                          <a:spcPts val="0"/>
-                        </a:spcBef>
-                        <a:spcAft>
-                          <a:spcPts val="0"/>
-                        </a:spcAft>
-                      </a:pPr>
-                      <a:r>
-                        <a:rPr sz="1300" b="0">
-                          <a:solidFill>
-                            <a:srgbClr val="1F1F1F"/>
-                          </a:solidFill>
-                          <a:latin typeface="Calibri"/>
-                        </a:rPr>
-                        <a:t>Não localizado nas cláusulas revisadas; requer</a:t>
-                      </a:r>
-                    </a:p>
-                    <a:p>
-                      <a:pPr algn="ctr">
-                        <a:lnSpc>
-                          <a:spcPct val="100000"/>
-                        </a:lnSpc>
-                        <a:spcBef>
-                          <a:spcPts val="0"/>
-                        </a:spcBef>
-                        <a:spcAft>
-                          <a:spcPts val="0"/>
-                        </a:spcAft>
-                      </a:pPr>
-                      <a:r>
-                        <a:rPr sz="1300" b="0">
-                          <a:solidFill>
-                            <a:srgbClr val="1F1F1F"/>
-                          </a:solidFill>
-                          <a:latin typeface="Calibri"/>
-                        </a:rPr>
-                        <a:t>documento aplicável</a:t>
-                      </a:r>
-                    </a:p>
-                  </a:txBody>
-                  <a:tcPr marL="91440" marR="91440" marT="41148" marB="41148" anchor="ctr">
-                    <a:solidFill>
-                      <a:srgbClr val="FFFFFF"/>
-                    </a:solidFill>
-                    <a:lnL>
-                      <a:noFill/>
-                    </a:lnL>
-                    <a:lnR>
-                      <a:noFill/>
-                    </a:lnR>
-                    <a:lnT>
-                      <a:noFill/>
-                    </a:lnT>
-                    <a:lnB>
-                      <a:noFill/>
-                    </a:lnB>
-                  </a:tcPr>
-                </a:tc>
-              </a:tr>
-              <a:tr h="470916">
-                <a:tc>
-                  <a:txBody>
-                    <a:bodyPr wrap="square">
-                      <a:noAutofit/>
-                    </a:bodyPr>
-                    <a:lstStyle/>
-                    <a:p>
-                      <a:pPr algn="l">
-                        <a:lnSpc>
-                          <a:spcPct val="100000"/>
-                        </a:lnSpc>
-                        <a:spcBef>
-                          <a:spcPts val="0"/>
-                        </a:spcBef>
-                        <a:spcAft>
-                          <a:spcPts val="0"/>
-                        </a:spcAft>
-                      </a:pPr>
-                      <a:r>
-                        <a:rPr sz="1300" b="1">
-                          <a:solidFill>
-                            <a:srgbClr val="1F1F1F"/>
-                          </a:solidFill>
-                          <a:latin typeface="Calibri"/>
-                        </a:rPr>
-                        <a:t>Cessão/recompra</a:t>
-                      </a:r>
-                    </a:p>
-                  </a:txBody>
-                  <a:tcPr marL="91440" marR="91440" marT="41148" marB="41148" anchor="ctr">
-                    <a:solidFill>
-                      <a:srgbClr val="FFFFFF"/>
-                    </a:solidFill>
-                    <a:lnL>
-                      <a:noFill/>
-                    </a:lnL>
-                    <a:lnR>
-                      <a:noFill/>
-                    </a:lnR>
-                    <a:lnT>
-                      <a:noFill/>
-                    </a:lnT>
-                    <a:lnB>
-                      <a:noFill/>
-                    </a:lnB>
-                  </a:tcPr>
-                </a:tc>
-                <a:tc>
-                  <a:txBody>
-                    <a:bodyPr wrap="square">
-                      <a:noAutofit/>
-                    </a:bodyPr>
-                    <a:lstStyle/>
-                    <a:p>
-                      <a:pPr algn="ctr">
-                        <a:lnSpc>
-                          <a:spcPct val="100000"/>
-                        </a:lnSpc>
-                        <a:spcBef>
-                          <a:spcPts val="0"/>
-                        </a:spcBef>
-                        <a:spcAft>
-                          <a:spcPts val="0"/>
-                        </a:spcAft>
-                      </a:pPr>
-                      <a:r>
-                        <a:rPr sz="1300" b="0">
-                          <a:solidFill>
-                            <a:srgbClr val="1F1F1F"/>
-                          </a:solidFill>
-                          <a:latin typeface="Calibri"/>
-                        </a:rPr>
-                        <a:t>Cessão definitiva, irrevogável e irretratável</a:t>
-                      </a:r>
-                    </a:p>
-                  </a:txBody>
-                  <a:tcPr marL="91440" marR="91440" marT="41148" marB="41148" anchor="ctr">
-                    <a:solidFill>
-                      <a:srgbClr val="FFFFFF"/>
-                    </a:solidFill>
-                    <a:lnL>
-                      <a:noFill/>
-                    </a:lnL>
-                    <a:lnR>
-                      <a:noFill/>
-                    </a:lnR>
-                    <a:lnT>
-                      <a:noFill/>
-                    </a:lnT>
-                    <a:lnB>
-                      <a:noFill/>
-                    </a:lnB>
-                  </a:tcPr>
-                </a:tc>
-                <a:tc>
-                  <a:txBody>
-                    <a:bodyPr wrap="square">
-                      <a:noAutofit/>
-                    </a:bodyPr>
-                    <a:lstStyle/>
-                    <a:p>
-                      <a:pPr algn="ctr">
-                        <a:lnSpc>
-                          <a:spcPct val="100000"/>
-                        </a:lnSpc>
-                        <a:spcBef>
-                          <a:spcPts val="0"/>
-                        </a:spcBef>
-                        <a:spcAft>
-                          <a:spcPts val="0"/>
-                        </a:spcAft>
-                      </a:pPr>
-                      <a:r>
-                        <a:rPr sz="1300" b="0">
-                          <a:solidFill>
-                            <a:srgbClr val="1F1F1F"/>
-                          </a:solidFill>
-                          <a:latin typeface="Calibri"/>
-                        </a:rPr>
-                        <a:t>Não localizado nas cláusulas revisadas; requer</a:t>
-                      </a:r>
-                    </a:p>
-                    <a:p>
-                      <a:pPr algn="ctr">
-                        <a:lnSpc>
-                          <a:spcPct val="100000"/>
-                        </a:lnSpc>
-                        <a:spcBef>
-                          <a:spcPts val="0"/>
-                        </a:spcBef>
-                        <a:spcAft>
-                          <a:spcPts val="0"/>
-                        </a:spcAft>
-                      </a:pPr>
-                      <a:r>
-                        <a:rPr sz="1300" b="0">
-                          <a:solidFill>
-                            <a:srgbClr val="1F1F1F"/>
-                          </a:solidFill>
-                          <a:latin typeface="Calibri"/>
-                        </a:rPr>
-                        <a:t>documento aplicável</a:t>
-                      </a:r>
-                    </a:p>
-                  </a:txBody>
-                  <a:tcPr marL="91440" marR="91440" marT="41148" marB="41148" anchor="ctr">
-                    <a:solidFill>
-                      <a:srgbClr val="FFFFFF"/>
-                    </a:solidFill>
-                    <a:lnL>
-                      <a:noFill/>
-                    </a:lnL>
-                    <a:lnR>
-                      <a:noFill/>
-                    </a:lnR>
-                    <a:lnT>
-                      <a:noFill/>
-                    </a:lnT>
-                    <a:lnB>
-                      <a:noFill/>
-                    </a:lnB>
-                  </a:tcPr>
-                </a:tc>
-              </a:tr>
-              <a:tr h="470916">
-                <a:tc>
-                  <a:txBody>
-                    <a:bodyPr wrap="square">
-                      <a:noAutofit/>
-                    </a:bodyPr>
-                    <a:lstStyle/>
-                    <a:p>
-                      <a:pPr algn="l">
-                        <a:lnSpc>
-                          <a:spcPct val="100000"/>
-                        </a:lnSpc>
-                        <a:spcBef>
-                          <a:spcPts val="0"/>
-                        </a:spcBef>
-                        <a:spcAft>
-                          <a:spcPts val="0"/>
-                        </a:spcAft>
-                      </a:pPr>
-                      <a:r>
-                        <a:rPr sz="1300" b="1">
-                          <a:solidFill>
-                            <a:srgbClr val="1F1F1F"/>
-                          </a:solidFill>
-                          <a:latin typeface="Calibri"/>
-                        </a:rPr>
-                        <a:t>Coobrigação</a:t>
-                      </a:r>
-                    </a:p>
-                  </a:txBody>
-                  <a:tcPr marL="91440" marR="91440" marT="41148" marB="41148" anchor="ctr">
-                    <a:solidFill>
-                      <a:srgbClr val="FFFFFF"/>
-                    </a:solidFill>
-                    <a:lnL>
-                      <a:noFill/>
-                    </a:lnL>
-                    <a:lnR>
-                      <a:noFill/>
-                    </a:lnR>
-                    <a:lnT>
-                      <a:noFill/>
-                    </a:lnT>
-                    <a:lnB>
-                      <a:noFill/>
-                    </a:lnB>
-                  </a:tcPr>
-                </a:tc>
-                <a:tc>
-                  <a:txBody>
-                    <a:bodyPr wrap="square">
-                      <a:noAutofit/>
-                    </a:bodyPr>
-                    <a:lstStyle/>
-                    <a:p>
-                      <a:pPr algn="ctr">
-                        <a:lnSpc>
-                          <a:spcPct val="100000"/>
-                        </a:lnSpc>
-                        <a:spcBef>
-                          <a:spcPts val="0"/>
-                        </a:spcBef>
-                        <a:spcAft>
-                          <a:spcPts val="0"/>
-                        </a:spcAft>
-                      </a:pPr>
-                      <a:r>
-                        <a:rPr sz="1300" b="0">
-                          <a:solidFill>
-                            <a:srgbClr val="1F1F1F"/>
-                          </a:solidFill>
-                          <a:latin typeface="Calibri"/>
-                        </a:rPr>
-                        <a:t>Aquisição com ou sem coobrigação do cedente ou</a:t>
-                      </a:r>
-                    </a:p>
-                    <a:p>
-                      <a:pPr algn="ctr">
-                        <a:lnSpc>
-                          <a:spcPct val="100000"/>
-                        </a:lnSpc>
-                        <a:spcBef>
-                          <a:spcPts val="0"/>
-                        </a:spcBef>
-                        <a:spcAft>
-                          <a:spcPts val="0"/>
-                        </a:spcAft>
-                      </a:pPr>
-                      <a:r>
-                        <a:rPr sz="1300" b="0">
-                          <a:solidFill>
-                            <a:srgbClr val="1F1F1F"/>
-                          </a:solidFill>
-                          <a:latin typeface="Calibri"/>
-                        </a:rPr>
-                        <a:t>terceiros</a:t>
-                      </a:r>
-                    </a:p>
-                  </a:txBody>
-                  <a:tcPr marL="91440" marR="91440" marT="41148" marB="41148" anchor="ctr">
-                    <a:solidFill>
-                      <a:srgbClr val="FFFFFF"/>
-                    </a:solidFill>
-                    <a:lnL>
-                      <a:noFill/>
-                    </a:lnL>
-                    <a:lnR>
-                      <a:noFill/>
-                    </a:lnR>
-                    <a:lnT>
-                      <a:noFill/>
-                    </a:lnT>
-                    <a:lnB>
-                      <a:noFill/>
-                    </a:lnB>
-                  </a:tcPr>
-                </a:tc>
-                <a:tc>
-                  <a:txBody>
-                    <a:bodyPr wrap="square">
-                      <a:noAutofit/>
-                    </a:bodyPr>
-                    <a:lstStyle/>
-                    <a:p>
-                      <a:pPr algn="ctr">
-                        <a:lnSpc>
-                          <a:spcPct val="100000"/>
-                        </a:lnSpc>
-                        <a:spcBef>
-                          <a:spcPts val="0"/>
-                        </a:spcBef>
-                        <a:spcAft>
-                          <a:spcPts val="0"/>
-                        </a:spcAft>
-                      </a:pPr>
-                      <a:r>
-                        <a:rPr sz="1300" b="0">
-                          <a:solidFill>
-                            <a:srgbClr val="1F1F1F"/>
-                          </a:solidFill>
-                          <a:latin typeface="Calibri"/>
-                        </a:rPr>
-                        <a:t>Não localizado nas cláusulas revisadas; requer</a:t>
-                      </a:r>
-                    </a:p>
-                    <a:p>
-                      <a:pPr algn="ctr">
-                        <a:lnSpc>
-                          <a:spcPct val="100000"/>
-                        </a:lnSpc>
-                        <a:spcBef>
-                          <a:spcPts val="0"/>
-                        </a:spcBef>
-                        <a:spcAft>
-                          <a:spcPts val="0"/>
-                        </a:spcAft>
-                      </a:pPr>
-                      <a:r>
-                        <a:rPr sz="1300" b="0">
-                          <a:solidFill>
-                            <a:srgbClr val="1F1F1F"/>
-                          </a:solidFill>
-                          <a:latin typeface="Calibri"/>
-                        </a:rPr>
-                        <a:t>documento aplicável</a:t>
-                      </a:r>
-                    </a:p>
-                  </a:txBody>
-                  <a:tcPr marL="91440" marR="91440" marT="41148" marB="41148" anchor="ctr">
-                    <a:solidFill>
-                      <a:srgbClr val="FFFFFF"/>
-                    </a:solidFill>
-                    <a:lnL>
-                      <a:noFill/>
-                    </a:lnL>
-                    <a:lnR>
-                      <a:noFill/>
-                    </a:lnR>
-                    <a:lnT>
-                      <a:noFill/>
-                    </a:lnT>
-                    <a:lnB>
-                      <a:noFill/>
-                    </a:lnB>
-                  </a:tcPr>
-                </a:tc>
-              </a:tr>
-              <a:tr h="470916">
+              <a:tr h="283464">
                 <a:tc>
                   <a:txBody>
                     <a:bodyPr wrap="square">
@@ -8226,29 +7786,7 @@
                           </a:solidFill>
                           <a:latin typeface="Calibri"/>
                         </a:rPr>
-                        <a:t>Não localizado nas fontes acessíveis desta</a:t>
-                      </a:r>
-                    </a:p>
-                    <a:p>
-                      <a:pPr algn="ctr">
-                        <a:lnSpc>
-                          <a:spcPct val="100000"/>
-                        </a:lnSpc>
-                        <a:spcBef>
-                          <a:spcPts val="0"/>
-                        </a:spcBef>
-                        <a:spcAft>
-                          <a:spcPts val="0"/>
-                        </a:spcAft>
-                      </a:pPr>
-                      <a:r>
-                        <a:rPr sz="1300" b="0">
-                          <a:solidFill>
-                            <a:srgbClr val="1F1F1F"/>
-                          </a:solidFill>
-                          <a:latin typeface="Calibri"/>
-                        </a:rPr>
-                        <a:t>leitura</a:t>
+                        <a:t>-</a:t>
                       </a:r>
                     </a:p>
                   </a:txBody>
@@ -8297,29 +7835,7 @@
                           </a:solidFill>
                           <a:latin typeface="Calibri"/>
                         </a:rPr>
-                        <a:t>Não localizado nas cláusulas revisadas; requer</a:t>
-                      </a:r>
-                    </a:p>
-                    <a:p>
-                      <a:pPr algn="ctr">
-                        <a:lnSpc>
-                          <a:spcPct val="100000"/>
-                        </a:lnSpc>
-                        <a:spcBef>
-                          <a:spcPts val="0"/>
-                        </a:spcBef>
-                        <a:spcAft>
-                          <a:spcPts val="0"/>
-                        </a:spcAft>
-                      </a:pPr>
-                      <a:r>
-                        <a:rPr sz="1300" b="0">
-                          <a:solidFill>
-                            <a:srgbClr val="1F1F1F"/>
-                          </a:solidFill>
-                          <a:latin typeface="Calibri"/>
-                        </a:rPr>
-                        <a:t>documento aplicável</a:t>
+                        <a:t>-</a:t>
                       </a:r>
                     </a:p>
                   </a:txBody>
@@ -8489,7 +8005,7 @@
         </p:nvGraphicFramePr>
         <p:xfrm>
           <a:off x="438912" y="932688"/>
-          <a:ext cx="11313870" cy="2276856"/>
+          <a:ext cx="11313870" cy="1527048"/>
         </p:xfrm>
         <a:graphic>
           <a:graphicData uri="http://schemas.openxmlformats.org/drawingml/2006/table">
@@ -8524,7 +8040,7 @@
                       <a:r>
                         <a:rPr sz="1300" b="1">
                           <a:solidFill>
-                            <a:srgbClr val="1F1F1F"/>
+                            <a:srgbClr val="FFFFFF"/>
                           </a:solidFill>
                           <a:latin typeface="Calibri"/>
                         </a:rPr>
@@ -8534,7 +8050,7 @@
                   </a:txBody>
                   <a:tcPr marL="91440" marR="91440" marT="41148" marB="41148" anchor="ctr">
                     <a:solidFill>
-                      <a:srgbClr val="EC7000"/>
+                      <a:srgbClr val="FF6200"/>
                     </a:solidFill>
                     <a:lnL>
                       <a:noFill/>
@@ -8573,7 +8089,7 @@
                       <a:r>
                         <a:rPr sz="1300" b="1">
                           <a:solidFill>
-                            <a:srgbClr val="1F1F1F"/>
+                            <a:srgbClr val="FFFFFF"/>
                           </a:solidFill>
                           <a:latin typeface="Calibri"/>
                         </a:rPr>
@@ -8583,7 +8099,7 @@
                   </a:txBody>
                   <a:tcPr marL="91440" marR="91440" marT="41148" marB="41148" anchor="ctr">
                     <a:solidFill>
-                      <a:srgbClr val="EC7000"/>
+                      <a:srgbClr val="FF6200"/>
                     </a:solidFill>
                     <a:lnL>
                       <a:noFill/>
@@ -8622,7 +8138,7 @@
                       <a:r>
                         <a:rPr sz="1300" b="1">
                           <a:solidFill>
-                            <a:srgbClr val="1F1F1F"/>
+                            <a:srgbClr val="FFFFFF"/>
                           </a:solidFill>
                           <a:latin typeface="Calibri"/>
                         </a:rPr>
@@ -8632,7 +8148,7 @@
                   </a:txBody>
                   <a:tcPr marL="91440" marR="91440" marT="41148" marB="41148" anchor="ctr">
                     <a:solidFill>
-                      <a:srgbClr val="EC7000"/>
+                      <a:srgbClr val="FF6200"/>
                     </a:solidFill>
                     <a:lnL>
                       <a:noFill/>
@@ -8651,7 +8167,7 @@
                   </a:tcPr>
                 </a:tc>
               </a:tr>
-              <a:tr h="470916">
+              <a:tr h="283464">
                 <a:tc>
                   <a:txBody>
                     <a:bodyPr wrap="square">
@@ -8724,29 +8240,7 @@
                           </a:solidFill>
                           <a:latin typeface="Calibri"/>
                         </a:rPr>
-                        <a:t>Não localizado nas fontes acessíveis desta</a:t>
-                      </a:r>
-                    </a:p>
-                    <a:p>
-                      <a:pPr algn="ctr">
-                        <a:lnSpc>
-                          <a:spcPct val="100000"/>
-                        </a:lnSpc>
-                        <a:spcBef>
-                          <a:spcPts val="0"/>
-                        </a:spcBef>
-                        <a:spcAft>
-                          <a:spcPts val="0"/>
-                        </a:spcAft>
-                      </a:pPr>
-                      <a:r>
-                        <a:rPr sz="1300" b="0">
-                          <a:solidFill>
-                            <a:srgbClr val="1F1F1F"/>
-                          </a:solidFill>
-                          <a:latin typeface="Calibri"/>
-                        </a:rPr>
-                        <a:t>leitura</a:t>
+                        <a:t>-</a:t>
                       </a:r>
                     </a:p>
                   </a:txBody>
@@ -8793,29 +8287,7 @@
                           </a:solidFill>
                           <a:latin typeface="Calibri"/>
                         </a:rPr>
-                        <a:t>Não localizado nas cláusulas revisadas; requer</a:t>
-                      </a:r>
-                    </a:p>
-                    <a:p>
-                      <a:pPr algn="ctr">
-                        <a:lnSpc>
-                          <a:spcPct val="100000"/>
-                        </a:lnSpc>
-                        <a:spcBef>
-                          <a:spcPts val="0"/>
-                        </a:spcBef>
-                        <a:spcAft>
-                          <a:spcPts val="0"/>
-                        </a:spcAft>
-                      </a:pPr>
-                      <a:r>
-                        <a:rPr sz="1300" b="0">
-                          <a:solidFill>
-                            <a:srgbClr val="1F1F1F"/>
-                          </a:solidFill>
-                          <a:latin typeface="Calibri"/>
-                        </a:rPr>
-                        <a:t>documento aplicável</a:t>
+                        <a:t>-</a:t>
                       </a:r>
                     </a:p>
                   </a:txBody>
@@ -8838,7 +8310,7 @@
                   </a:tcPr>
                 </a:tc>
               </a:tr>
-              <a:tr h="470916">
+              <a:tr h="283464">
                 <a:tc>
                   <a:txBody>
                     <a:bodyPr wrap="square">
@@ -8911,29 +8383,7 @@
                           </a:solidFill>
                           <a:latin typeface="Calibri"/>
                         </a:rPr>
-                        <a:t>Spread final não localizado nas fontes dirigidas</a:t>
-                      </a:r>
-                    </a:p>
-                    <a:p>
-                      <a:pPr algn="ctr">
-                        <a:lnSpc>
-                          <a:spcPct val="100000"/>
-                        </a:lnSpc>
-                        <a:spcBef>
-                          <a:spcPts val="0"/>
-                        </a:spcBef>
-                        <a:spcAft>
-                          <a:spcPts val="0"/>
-                        </a:spcAft>
-                      </a:pPr>
-                      <a:r>
-                        <a:rPr sz="1300" b="0">
-                          <a:solidFill>
-                            <a:srgbClr val="1F1F1F"/>
-                          </a:solidFill>
-                          <a:latin typeface="Calibri"/>
-                        </a:rPr>
-                        <a:t>desta leitura</a:t>
+                        <a:t>-</a:t>
                       </a:r>
                     </a:p>
                   </a:txBody>
@@ -8980,29 +8430,7 @@
                           </a:solidFill>
                           <a:latin typeface="Calibri"/>
                         </a:rPr>
-                        <a:t>Spread final não localizado nas cláusulas</a:t>
-                      </a:r>
-                    </a:p>
-                    <a:p>
-                      <a:pPr algn="ctr">
-                        <a:lnSpc>
-                          <a:spcPct val="100000"/>
-                        </a:lnSpc>
-                        <a:spcBef>
-                          <a:spcPts val="0"/>
-                        </a:spcBef>
-                        <a:spcAft>
-                          <a:spcPts val="0"/>
-                        </a:spcAft>
-                      </a:pPr>
-                      <a:r>
-                        <a:rPr sz="1300" b="0">
-                          <a:solidFill>
-                            <a:srgbClr val="1F1F1F"/>
-                          </a:solidFill>
-                          <a:latin typeface="Calibri"/>
-                        </a:rPr>
-                        <a:t>revisadas; requer suplemento ou ato específico</a:t>
+                        <a:t>-</a:t>
                       </a:r>
                     </a:p>
                   </a:txBody>
@@ -9025,7 +8453,7 @@
                   </a:tcPr>
                 </a:tc>
               </a:tr>
-              <a:tr h="470916">
+              <a:tr h="283464">
                 <a:tc>
                   <a:txBody>
                     <a:bodyPr wrap="square">
@@ -9098,29 +8526,7 @@
                           </a:solidFill>
                           <a:latin typeface="Calibri"/>
                         </a:rPr>
-                        <a:t>Não localizado nas fontes acessíveis desta</a:t>
-                      </a:r>
-                    </a:p>
-                    <a:p>
-                      <a:pPr algn="ctr">
-                        <a:lnSpc>
-                          <a:spcPct val="100000"/>
-                        </a:lnSpc>
-                        <a:spcBef>
-                          <a:spcPts val="0"/>
-                        </a:spcBef>
-                        <a:spcAft>
-                          <a:spcPts val="0"/>
-                        </a:spcAft>
-                      </a:pPr>
-                      <a:r>
-                        <a:rPr sz="1300" b="0">
-                          <a:solidFill>
-                            <a:srgbClr val="1F1F1F"/>
-                          </a:solidFill>
-                          <a:latin typeface="Calibri"/>
-                        </a:rPr>
-                        <a:t>leitura</a:t>
+                        <a:t>-</a:t>
                       </a:r>
                     </a:p>
                   </a:txBody>
@@ -9167,29 +8573,7 @@
                           </a:solidFill>
                           <a:latin typeface="Calibri"/>
                         </a:rPr>
-                        <a:t>Não localizado nas cláusulas revisadas; requer</a:t>
-                      </a:r>
-                    </a:p>
-                    <a:p>
-                      <a:pPr algn="ctr">
-                        <a:lnSpc>
-                          <a:spcPct val="100000"/>
-                        </a:lnSpc>
-                        <a:spcBef>
-                          <a:spcPts val="0"/>
-                        </a:spcBef>
-                        <a:spcAft>
-                          <a:spcPts val="0"/>
-                        </a:spcAft>
-                      </a:pPr>
-                      <a:r>
-                        <a:rPr sz="1300" b="0">
-                          <a:solidFill>
-                            <a:srgbClr val="1F1F1F"/>
-                          </a:solidFill>
-                          <a:latin typeface="Calibri"/>
-                        </a:rPr>
-                        <a:t>documento aplicável</a:t>
+                        <a:t>-</a:t>
                       </a:r>
                     </a:p>
                   </a:txBody>
@@ -9212,7 +8596,7 @@
                   </a:tcPr>
                 </a:tc>
               </a:tr>
-              <a:tr h="470916">
+              <a:tr h="283464">
                 <a:tc>
                   <a:txBody>
                     <a:bodyPr wrap="square">
@@ -9287,29 +8671,7 @@
                           </a:solidFill>
                           <a:latin typeface="Calibri"/>
                         </a:rPr>
-                        <a:t>Não localizado nas fontes acessíveis desta</a:t>
-                      </a:r>
-                    </a:p>
-                    <a:p>
-                      <a:pPr algn="ctr">
-                        <a:lnSpc>
-                          <a:spcPct val="100000"/>
-                        </a:lnSpc>
-                        <a:spcBef>
-                          <a:spcPts val="0"/>
-                        </a:spcBef>
-                        <a:spcAft>
-                          <a:spcPts val="0"/>
-                        </a:spcAft>
-                      </a:pPr>
-                      <a:r>
-                        <a:rPr sz="1300" b="0">
-                          <a:solidFill>
-                            <a:srgbClr val="1F1F1F"/>
-                          </a:solidFill>
-                          <a:latin typeface="Calibri"/>
-                        </a:rPr>
-                        <a:t>leitura</a:t>
+                        <a:t>-</a:t>
                       </a:r>
                     </a:p>
                   </a:txBody>
@@ -9358,29 +8720,7 @@
                           </a:solidFill>
                           <a:latin typeface="Calibri"/>
                         </a:rPr>
-                        <a:t>Não localizado nas cláusulas revisadas; requer</a:t>
-                      </a:r>
-                    </a:p>
-                    <a:p>
-                      <a:pPr algn="ctr">
-                        <a:lnSpc>
-                          <a:spcPct val="100000"/>
-                        </a:lnSpc>
-                        <a:spcBef>
-                          <a:spcPts val="0"/>
-                        </a:spcBef>
-                        <a:spcAft>
-                          <a:spcPts val="0"/>
-                        </a:spcAft>
-                      </a:pPr>
-                      <a:r>
-                        <a:rPr sz="1300" b="0">
-                          <a:solidFill>
-                            <a:srgbClr val="1F1F1F"/>
-                          </a:solidFill>
-                          <a:latin typeface="Calibri"/>
-                        </a:rPr>
-                        <a:t>documento aplicável</a:t>
+                        <a:t>-</a:t>
                       </a:r>
                     </a:p>
                   </a:txBody>
@@ -9550,7 +8890,7 @@
         </p:nvGraphicFramePr>
         <p:xfrm>
           <a:off x="438912" y="932688"/>
-          <a:ext cx="11313870" cy="1805940"/>
+          <a:ext cx="11313870" cy="1243584"/>
         </p:xfrm>
         <a:graphic>
           <a:graphicData uri="http://schemas.openxmlformats.org/drawingml/2006/table">
@@ -9585,7 +8925,7 @@
                       <a:r>
                         <a:rPr sz="1300" b="1">
                           <a:solidFill>
-                            <a:srgbClr val="1F1F1F"/>
+                            <a:srgbClr val="FFFFFF"/>
                           </a:solidFill>
                           <a:latin typeface="Calibri"/>
                         </a:rPr>
@@ -9595,7 +8935,7 @@
                   </a:txBody>
                   <a:tcPr marL="91440" marR="91440" marT="41148" marB="41148" anchor="ctr">
                     <a:solidFill>
-                      <a:srgbClr val="EC7000"/>
+                      <a:srgbClr val="FF6200"/>
                     </a:solidFill>
                     <a:lnL>
                       <a:noFill/>
@@ -9634,7 +8974,7 @@
                       <a:r>
                         <a:rPr sz="1300" b="1">
                           <a:solidFill>
-                            <a:srgbClr val="1F1F1F"/>
+                            <a:srgbClr val="FFFFFF"/>
                           </a:solidFill>
                           <a:latin typeface="Calibri"/>
                         </a:rPr>
@@ -9644,7 +8984,7 @@
                   </a:txBody>
                   <a:tcPr marL="91440" marR="91440" marT="41148" marB="41148" anchor="ctr">
                     <a:solidFill>
-                      <a:srgbClr val="EC7000"/>
+                      <a:srgbClr val="FF6200"/>
                     </a:solidFill>
                     <a:lnL>
                       <a:noFill/>
@@ -9683,7 +9023,7 @@
                       <a:r>
                         <a:rPr sz="1300" b="1">
                           <a:solidFill>
-                            <a:srgbClr val="1F1F1F"/>
+                            <a:srgbClr val="FFFFFF"/>
                           </a:solidFill>
                           <a:latin typeface="Calibri"/>
                         </a:rPr>
@@ -9693,7 +9033,7 @@
                   </a:txBody>
                   <a:tcPr marL="91440" marR="91440" marT="41148" marB="41148" anchor="ctr">
                     <a:solidFill>
-                      <a:srgbClr val="EC7000"/>
+                      <a:srgbClr val="FF6200"/>
                     </a:solidFill>
                     <a:lnL>
                       <a:noFill/>
@@ -9712,7 +9052,7 @@
                   </a:tcPr>
                 </a:tc>
               </a:tr>
-              <a:tr h="470916">
+              <a:tr h="283464">
                 <a:tc>
                   <a:txBody>
                     <a:bodyPr wrap="square">
@@ -9785,29 +9125,7 @@
                           </a:solidFill>
                           <a:latin typeface="Calibri"/>
                         </a:rPr>
-                        <a:t>Não localizado nas fontes acessíveis desta</a:t>
-                      </a:r>
-                    </a:p>
-                    <a:p>
-                      <a:pPr algn="ctr">
-                        <a:lnSpc>
-                          <a:spcPct val="100000"/>
-                        </a:lnSpc>
-                        <a:spcBef>
-                          <a:spcPts val="0"/>
-                        </a:spcBef>
-                        <a:spcAft>
-                          <a:spcPts val="0"/>
-                        </a:spcAft>
-                      </a:pPr>
-                      <a:r>
-                        <a:rPr sz="1300" b="0">
-                          <a:solidFill>
-                            <a:srgbClr val="1F1F1F"/>
-                          </a:solidFill>
-                          <a:latin typeface="Calibri"/>
-                        </a:rPr>
-                        <a:t>leitura</a:t>
+                        <a:t>-</a:t>
                       </a:r>
                     </a:p>
                   </a:txBody>
@@ -9854,29 +9172,7 @@
                           </a:solidFill>
                           <a:latin typeface="Calibri"/>
                         </a:rPr>
-                        <a:t>Não localizado nas cláusulas revisadas; requer</a:t>
-                      </a:r>
-                    </a:p>
-                    <a:p>
-                      <a:pPr algn="ctr">
-                        <a:lnSpc>
-                          <a:spcPct val="100000"/>
-                        </a:lnSpc>
-                        <a:spcBef>
-                          <a:spcPts val="0"/>
-                        </a:spcBef>
-                        <a:spcAft>
-                          <a:spcPts val="0"/>
-                        </a:spcAft>
-                      </a:pPr>
-                      <a:r>
-                        <a:rPr sz="1300" b="0">
-                          <a:solidFill>
-                            <a:srgbClr val="1F1F1F"/>
-                          </a:solidFill>
-                          <a:latin typeface="Calibri"/>
-                        </a:rPr>
-                        <a:t>documento aplicável</a:t>
+                        <a:t>-</a:t>
                       </a:r>
                     </a:p>
                   </a:txBody>
@@ -9899,7 +9195,7 @@
                   </a:tcPr>
                 </a:tc>
               </a:tr>
-              <a:tr h="470916">
+              <a:tr h="283464">
                 <a:tc>
                   <a:txBody>
                     <a:bodyPr wrap="square">
@@ -9972,29 +9268,7 @@
                           </a:solidFill>
                           <a:latin typeface="Calibri"/>
                         </a:rPr>
-                        <a:t>Não localizado nas fontes acessíveis desta</a:t>
-                      </a:r>
-                    </a:p>
-                    <a:p>
-                      <a:pPr algn="ctr">
-                        <a:lnSpc>
-                          <a:spcPct val="100000"/>
-                        </a:lnSpc>
-                        <a:spcBef>
-                          <a:spcPts val="0"/>
-                        </a:spcBef>
-                        <a:spcAft>
-                          <a:spcPts val="0"/>
-                        </a:spcAft>
-                      </a:pPr>
-                      <a:r>
-                        <a:rPr sz="1300" b="0">
-                          <a:solidFill>
-                            <a:srgbClr val="1F1F1F"/>
-                          </a:solidFill>
-                          <a:latin typeface="Calibri"/>
-                        </a:rPr>
-                        <a:t>leitura</a:t>
+                        <a:t>-</a:t>
                       </a:r>
                     </a:p>
                   </a:txBody>
@@ -10041,29 +9315,7 @@
                           </a:solidFill>
                           <a:latin typeface="Calibri"/>
                         </a:rPr>
-                        <a:t>Não localizado nas cláusulas revisadas; requer</a:t>
-                      </a:r>
-                    </a:p>
-                    <a:p>
-                      <a:pPr algn="ctr">
-                        <a:lnSpc>
-                          <a:spcPct val="100000"/>
-                        </a:lnSpc>
-                        <a:spcBef>
-                          <a:spcPts val="0"/>
-                        </a:spcBef>
-                        <a:spcAft>
-                          <a:spcPts val="0"/>
-                        </a:spcAft>
-                      </a:pPr>
-                      <a:r>
-                        <a:rPr sz="1300" b="0">
-                          <a:solidFill>
-                            <a:srgbClr val="1F1F1F"/>
-                          </a:solidFill>
-                          <a:latin typeface="Calibri"/>
-                        </a:rPr>
-                        <a:t>documento aplicável</a:t>
+                        <a:t>-</a:t>
                       </a:r>
                     </a:p>
                   </a:txBody>
@@ -10086,7 +9338,7 @@
                   </a:tcPr>
                 </a:tc>
               </a:tr>
-              <a:tr h="470916">
+              <a:tr h="283464">
                 <a:tc>
                   <a:txBody>
                     <a:bodyPr wrap="square">
@@ -10161,29 +9413,7 @@
                           </a:solidFill>
                           <a:latin typeface="Calibri"/>
                         </a:rPr>
-                        <a:t>Não localizado nas fontes acessíveis desta</a:t>
-                      </a:r>
-                    </a:p>
-                    <a:p>
-                      <a:pPr algn="ctr">
-                        <a:lnSpc>
-                          <a:spcPct val="100000"/>
-                        </a:lnSpc>
-                        <a:spcBef>
-                          <a:spcPts val="0"/>
-                        </a:spcBef>
-                        <a:spcAft>
-                          <a:spcPts val="0"/>
-                        </a:spcAft>
-                      </a:pPr>
-                      <a:r>
-                        <a:rPr sz="1300" b="0">
-                          <a:solidFill>
-                            <a:srgbClr val="1F1F1F"/>
-                          </a:solidFill>
-                          <a:latin typeface="Calibri"/>
-                        </a:rPr>
-                        <a:t>leitura</a:t>
+                        <a:t>-</a:t>
                       </a:r>
                     </a:p>
                   </a:txBody>
@@ -10232,29 +9462,7 @@
                           </a:solidFill>
                           <a:latin typeface="Calibri"/>
                         </a:rPr>
-                        <a:t>Não localizado nas cláusulas revisadas; requer</a:t>
-                      </a:r>
-                    </a:p>
-                    <a:p>
-                      <a:pPr algn="ctr">
-                        <a:lnSpc>
-                          <a:spcPct val="100000"/>
-                        </a:lnSpc>
-                        <a:spcBef>
-                          <a:spcPts val="0"/>
-                        </a:spcBef>
-                        <a:spcAft>
-                          <a:spcPts val="0"/>
-                        </a:spcAft>
-                      </a:pPr>
-                      <a:r>
-                        <a:rPr sz="1300" b="0">
-                          <a:solidFill>
-                            <a:srgbClr val="1F1F1F"/>
-                          </a:solidFill>
-                          <a:latin typeface="Calibri"/>
-                        </a:rPr>
-                        <a:t>documento aplicável</a:t>
+                        <a:t>-</a:t>
                       </a:r>
                     </a:p>
                   </a:txBody>
@@ -10459,7 +9667,7 @@
                       <a:r>
                         <a:rPr sz="1300" b="1">
                           <a:solidFill>
-                            <a:srgbClr val="1F1F1F"/>
+                            <a:srgbClr val="FFFFFF"/>
                           </a:solidFill>
                           <a:latin typeface="Calibri"/>
                         </a:rPr>
@@ -10469,7 +9677,7 @@
                   </a:txBody>
                   <a:tcPr marL="91440" marR="91440" marT="41148" marB="41148" anchor="ctr">
                     <a:solidFill>
-                      <a:srgbClr val="EC7000"/>
+                      <a:srgbClr val="FF6200"/>
                     </a:solidFill>
                     <a:lnL>
                       <a:noFill/>
@@ -10508,7 +9716,7 @@
                       <a:r>
                         <a:rPr sz="1300" b="1">
                           <a:solidFill>
-                            <a:srgbClr val="1F1F1F"/>
+                            <a:srgbClr val="FFFFFF"/>
                           </a:solidFill>
                           <a:latin typeface="Calibri"/>
                         </a:rPr>
@@ -10518,7 +9726,7 @@
                   </a:txBody>
                   <a:tcPr marL="91440" marR="91440" marT="41148" marB="41148" anchor="ctr">
                     <a:solidFill>
-                      <a:srgbClr val="EC7000"/>
+                      <a:srgbClr val="FF6200"/>
                     </a:solidFill>
                     <a:lnL>
                       <a:noFill/>
@@ -10557,7 +9765,7 @@
                       <a:r>
                         <a:rPr sz="1300" b="1">
                           <a:solidFill>
-                            <a:srgbClr val="1F1F1F"/>
+                            <a:srgbClr val="FFFFFF"/>
                           </a:solidFill>
                           <a:latin typeface="Calibri"/>
                         </a:rPr>
@@ -10567,7 +9775,7 @@
                   </a:txBody>
                   <a:tcPr marL="91440" marR="91440" marT="41148" marB="41148" anchor="ctr">
                     <a:solidFill>
-                      <a:srgbClr val="EC7000"/>
+                      <a:srgbClr val="FF6200"/>
                     </a:solidFill>
                     <a:lnL>
                       <a:noFill/>
@@ -10915,29 +10123,7 @@
                           </a:solidFill>
                           <a:latin typeface="Calibri"/>
                         </a:rPr>
-                        <a:t>1,20% a.a. PL; mínimo não individualizado nas</a:t>
-                      </a:r>
-                    </a:p>
-                    <a:p>
-                      <a:pPr algn="ctr">
-                        <a:lnSpc>
-                          <a:spcPct val="100000"/>
-                        </a:lnSpc>
-                        <a:spcBef>
-                          <a:spcPts val="0"/>
-                        </a:spcBef>
-                        <a:spcAft>
-                          <a:spcPts val="0"/>
-                        </a:spcAft>
-                      </a:pPr>
-                      <a:r>
-                        <a:rPr sz="1300" b="0">
-                          <a:solidFill>
-                            <a:srgbClr val="1F1F1F"/>
-                          </a:solidFill>
-                          <a:latin typeface="Calibri"/>
-                        </a:rPr>
-                        <a:t>cláusulas revisadas</a:t>
+                        <a:t>1,20% a.a.; PL</a:t>
                       </a:r>
                     </a:p>
                   </a:txBody>
@@ -11276,7 +10462,7 @@
         </p:nvGraphicFramePr>
         <p:xfrm>
           <a:off x="438912" y="932688"/>
-          <a:ext cx="11313870" cy="2651760"/>
+          <a:ext cx="11313870" cy="2464308"/>
         </p:xfrm>
         <a:graphic>
           <a:graphicData uri="http://schemas.openxmlformats.org/drawingml/2006/table">
@@ -11311,7 +10497,7 @@
                       <a:r>
                         <a:rPr sz="1300" b="1">
                           <a:solidFill>
-                            <a:srgbClr val="1F1F1F"/>
+                            <a:srgbClr val="FFFFFF"/>
                           </a:solidFill>
                           <a:latin typeface="Calibri"/>
                         </a:rPr>
@@ -11321,7 +10507,7 @@
                   </a:txBody>
                   <a:tcPr marL="91440" marR="91440" marT="41148" marB="41148" anchor="ctr">
                     <a:solidFill>
-                      <a:srgbClr val="EC7000"/>
+                      <a:srgbClr val="FF6200"/>
                     </a:solidFill>
                     <a:lnL>
                       <a:noFill/>
@@ -11360,7 +10546,7 @@
                       <a:r>
                         <a:rPr sz="1300" b="1">
                           <a:solidFill>
-                            <a:srgbClr val="1F1F1F"/>
+                            <a:srgbClr val="FFFFFF"/>
                           </a:solidFill>
                           <a:latin typeface="Calibri"/>
                         </a:rPr>
@@ -11370,7 +10556,7 @@
                   </a:txBody>
                   <a:tcPr marL="91440" marR="91440" marT="41148" marB="41148" anchor="ctr">
                     <a:solidFill>
-                      <a:srgbClr val="EC7000"/>
+                      <a:srgbClr val="FF6200"/>
                     </a:solidFill>
                     <a:lnL>
                       <a:noFill/>
@@ -11409,7 +10595,7 @@
                       <a:r>
                         <a:rPr sz="1300" b="1">
                           <a:solidFill>
-                            <a:srgbClr val="1F1F1F"/>
+                            <a:srgbClr val="FFFFFF"/>
                           </a:solidFill>
                           <a:latin typeface="Calibri"/>
                         </a:rPr>
@@ -11419,7 +10605,7 @@
                   </a:txBody>
                   <a:tcPr marL="91440" marR="91440" marT="41148" marB="41148" anchor="ctr">
                     <a:solidFill>
-                      <a:srgbClr val="EC7000"/>
+                      <a:srgbClr val="FF6200"/>
                     </a:solidFill>
                     <a:lnL>
                       <a:noFill/>
@@ -11438,7 +10624,7 @@
                   </a:tcPr>
                 </a:tc>
               </a:tr>
-              <a:tr h="658368">
+              <a:tr h="470916">
                 <a:tc>
                   <a:txBody>
                     <a:bodyPr wrap="square">
@@ -11555,29 +10741,7 @@
                           </a:solidFill>
                           <a:latin typeface="Calibri"/>
                         </a:rPr>
-                        <a:t>PL; validar ativo elegível, subclasses e fórmula</a:t>
-                      </a:r>
-                    </a:p>
-                    <a:p>
-                      <a:pPr algn="ctr">
-                        <a:lnSpc>
-                          <a:spcPct val="100000"/>
-                        </a:lnSpc>
-                        <a:spcBef>
-                          <a:spcPts val="0"/>
-                        </a:spcBef>
-                        <a:spcAft>
-                          <a:spcPts val="0"/>
-                        </a:spcAft>
-                      </a:pPr>
-                      <a:r>
-                        <a:rPr sz="1300" b="0">
-                          <a:solidFill>
-                            <a:srgbClr val="1F1F1F"/>
-                          </a:solidFill>
-                          <a:latin typeface="Calibri"/>
-                        </a:rPr>
-                        <a:t>contratual</a:t>
+                        <a:t>PL</a:t>
                       </a:r>
                     </a:p>
                   </a:txBody>
@@ -11624,29 +10788,7 @@
                           </a:solidFill>
                           <a:latin typeface="Calibri"/>
                         </a:rPr>
-                        <a:t>DC/PL e composição de cotas ajudam; validar</a:t>
-                      </a:r>
-                    </a:p>
-                    <a:p>
-                      <a:pPr algn="ctr">
-                        <a:lnSpc>
-                          <a:spcPct val="100000"/>
-                        </a:lnSpc>
-                        <a:spcBef>
-                          <a:spcPts val="0"/>
-                        </a:spcBef>
-                        <a:spcAft>
-                          <a:spcPts val="0"/>
-                        </a:spcAft>
-                      </a:pPr>
-                      <a:r>
-                        <a:rPr sz="1300" b="0">
-                          <a:solidFill>
-                            <a:srgbClr val="1F1F1F"/>
-                          </a:solidFill>
-                          <a:latin typeface="Calibri"/>
-                        </a:rPr>
-                        <a:t>numerador, denominador e versão contratual</a:t>
+                        <a:t>DC/PL e composição de cotas ajudam</a:t>
                       </a:r>
                     </a:p>
                   </a:txBody>
@@ -12162,7 +11304,7 @@
                           </a:solidFill>
                           <a:latin typeface="Calibri"/>
                         </a:rPr>
-                        <a:t>Sem competência IME carregada em cache local</a:t>
+                        <a:t>-</a:t>
                       </a:r>
                     </a:p>
                   </a:txBody>
@@ -12211,7 +11353,7 @@
                           </a:solidFill>
                           <a:latin typeface="Calibri"/>
                         </a:rPr>
-                        <a:t>Sem competência IME carregada em cache local</a:t>
+                        <a:t>-</a:t>
                       </a:r>
                     </a:p>
                   </a:txBody>
